--- a/가르치지않아도배운다_발표_v2.pptx
+++ b/가르치지않아도배운다_발표_v2.pptx
@@ -5,7 +5,7 @@
     <p:sldMasterId id="2147483648" r:id="rId1"/>
   </p:sldMasterIdLst>
   <p:notesMasterIdLst>
-    <p:notesMasterId r:id="rId23"/>
+    <p:notesMasterId r:id="rId24"/>
   </p:notesMasterIdLst>
   <p:sldIdLst>
     <p:sldId id="256" r:id="rId2"/>
@@ -13,22 +13,23 @@
     <p:sldId id="258" r:id="rId4"/>
     <p:sldId id="276" r:id="rId5"/>
     <p:sldId id="259" r:id="rId6"/>
-    <p:sldId id="260" r:id="rId7"/>
-    <p:sldId id="261" r:id="rId8"/>
-    <p:sldId id="262" r:id="rId9"/>
-    <p:sldId id="263" r:id="rId10"/>
-    <p:sldId id="264" r:id="rId11"/>
-    <p:sldId id="265" r:id="rId12"/>
-    <p:sldId id="266" r:id="rId13"/>
-    <p:sldId id="267" r:id="rId14"/>
-    <p:sldId id="268" r:id="rId15"/>
-    <p:sldId id="269" r:id="rId16"/>
-    <p:sldId id="270" r:id="rId17"/>
-    <p:sldId id="271" r:id="rId18"/>
-    <p:sldId id="272" r:id="rId19"/>
-    <p:sldId id="273" r:id="rId20"/>
-    <p:sldId id="274" r:id="rId21"/>
-    <p:sldId id="275" r:id="rId22"/>
+    <p:sldId id="277" r:id="rId7"/>
+    <p:sldId id="260" r:id="rId8"/>
+    <p:sldId id="261" r:id="rId9"/>
+    <p:sldId id="262" r:id="rId10"/>
+    <p:sldId id="263" r:id="rId11"/>
+    <p:sldId id="264" r:id="rId12"/>
+    <p:sldId id="265" r:id="rId13"/>
+    <p:sldId id="266" r:id="rId14"/>
+    <p:sldId id="267" r:id="rId15"/>
+    <p:sldId id="268" r:id="rId16"/>
+    <p:sldId id="269" r:id="rId17"/>
+    <p:sldId id="270" r:id="rId18"/>
+    <p:sldId id="271" r:id="rId19"/>
+    <p:sldId id="272" r:id="rId20"/>
+    <p:sldId id="273" r:id="rId21"/>
+    <p:sldId id="274" r:id="rId22"/>
+    <p:sldId id="275" r:id="rId23"/>
   </p:sldIdLst>
   <p:sldSz cx="12192000" cy="6858000"/>
   <p:notesSz cx="6858000" cy="12192000"/>
@@ -1433,6 +1434,90 @@
 </p:notes>
 </file>
 
+<file path=ppt/notesSlides/notesSlide22.xml><?xml version="1.0" encoding="utf-8"?>
+<p:notes xmlns:a="http://schemas.openxmlformats.org/drawingml/2006/main" xmlns:r="http://schemas.openxmlformats.org/officeDocument/2006/relationships" xmlns:p="http://schemas.openxmlformats.org/presentationml/2006/main">
+  <p:cSld>
+    <p:spTree>
+      <p:nvGrpSpPr>
+        <p:cNvPr id="1" name=""/>
+        <p:cNvGrpSpPr/>
+        <p:nvPr/>
+      </p:nvGrpSpPr>
+      <p:grpSpPr>
+        <a:xfrm>
+          <a:off x="0" y="0"/>
+          <a:ext cx="0" cy="0"/>
+          <a:chOff x="0" y="0"/>
+          <a:chExt cx="0" cy="0"/>
+        </a:xfrm>
+      </p:grpSpPr>
+      <p:sp>
+        <p:nvSpPr>
+          <p:cNvPr id="2" name="Slide Image Placeholder 1"/>
+          <p:cNvSpPr>
+            <a:spLocks noGrp="1" noRot="1" noChangeAspect="1"/>
+          </p:cNvSpPr>
+          <p:nvPr>
+            <p:ph type="sldImg"/>
+          </p:nvPr>
+        </p:nvSpPr>
+        <p:spPr/>
+      </p:sp>
+      <p:sp>
+        <p:nvSpPr>
+          <p:cNvPr id="3" name="Notes Placeholder 2"/>
+          <p:cNvSpPr>
+            <a:spLocks noGrp="1"/>
+          </p:cNvSpPr>
+          <p:nvPr>
+            <p:ph type="body" idx="1"/>
+          </p:nvPr>
+        </p:nvSpPr>
+        <p:spPr/>
+        <p:txBody>
+          <a:bodyPr/>
+          <a:lstStyle/>
+          <a:p>
+            <a:endParaRPr lang="en-US" dirty="0"/>
+          </a:p>
+        </p:txBody>
+      </p:sp>
+      <p:sp>
+        <p:nvSpPr>
+          <p:cNvPr id="4" name="Slide Number Placeholder 3"/>
+          <p:cNvSpPr>
+            <a:spLocks noGrp="1"/>
+          </p:cNvSpPr>
+          <p:nvPr>
+            <p:ph type="sldNum" sz="quarter" idx="10"/>
+          </p:nvPr>
+        </p:nvSpPr>
+        <p:spPr/>
+        <p:txBody>
+          <a:bodyPr/>
+          <a:lstStyle/>
+          <a:p>
+            <a:fld id="{F7021451-1387-4CA6-816F-3879F97B5CBC}" type="slidenum">
+              <a:rPr lang="en-US"/>
+              <a:t>22</a:t>
+            </a:fld>
+            <a:endParaRPr lang="en-US"/>
+          </a:p>
+        </p:txBody>
+      </p:sp>
+    </p:spTree>
+    <p:extLst>
+      <p:ext uri="{BB962C8B-B14F-4D97-AF65-F5344CB8AC3E}">
+        <p14:creationId xmlns:p14="http://schemas.microsoft.com/office/powerpoint/2010/main" val="1024086991"/>
+      </p:ext>
+    </p:extLst>
+  </p:cSld>
+  <p:clrMapOvr>
+    <a:masterClrMapping/>
+  </p:clrMapOvr>
+</p:notes>
+</file>
+
 <file path=ppt/notesSlides/notesSlide3.xml><?xml version="1.0" encoding="utf-8"?>
 <p:notes xmlns:a="http://schemas.openxmlformats.org/drawingml/2006/main" xmlns:r="http://schemas.openxmlformats.org/officeDocument/2006/relationships" xmlns:p="http://schemas.openxmlformats.org/presentationml/2006/main">
   <p:cSld>
@@ -1808,18 +1893,78 @@
           <a:bodyPr/>
           <a:lstStyle/>
           <a:p>
+            <a:pPr marL="0" marR="0" lvl="0" indent="0" algn="l" defTabSz="914400" rtl="0" eaLnBrk="1" fontAlgn="auto" latinLnBrk="0" hangingPunct="1">
+              <a:lnSpc>
+                <a:spcPct val="100000"/>
+              </a:lnSpc>
+              <a:spcBef>
+                <a:spcPts val="0"/>
+              </a:spcBef>
+              <a:spcAft>
+                <a:spcPts val="0"/>
+              </a:spcAft>
+              <a:buClrTx/>
+              <a:buSzTx/>
+              <a:buFontTx/>
+              <a:buNone/>
+              <a:tabLst/>
+              <a:defRPr/>
+            </a:pPr>
             <a:fld id="{F7021451-1387-4CA6-816F-3879F97B5CBC}" type="slidenum">
-              <a:rPr lang="en-US"/>
+              <a:rPr kumimoji="0" lang="en-US" sz="1800" b="0" i="0" u="none" strike="noStrike" kern="1200" cap="none" spc="0" normalizeH="0" baseline="0" noProof="0">
+                <a:ln>
+                  <a:noFill/>
+                </a:ln>
+                <a:solidFill>
+                  <a:prstClr val="black"/>
+                </a:solidFill>
+                <a:effectLst/>
+                <a:uLnTx/>
+                <a:uFillTx/>
+                <a:latin typeface="맑은 고딕" panose="020F0502020204030204"/>
+                <a:ea typeface="+mn-ea"/>
+                <a:cs typeface="+mn-cs"/>
+              </a:rPr>
+              <a:pPr marL="0" marR="0" lvl="0" indent="0" algn="l" defTabSz="914400" rtl="0" eaLnBrk="1" fontAlgn="auto" latinLnBrk="0" hangingPunct="1">
+                <a:lnSpc>
+                  <a:spcPct val="100000"/>
+                </a:lnSpc>
+                <a:spcBef>
+                  <a:spcPts val="0"/>
+                </a:spcBef>
+                <a:spcAft>
+                  <a:spcPts val="0"/>
+                </a:spcAft>
+                <a:buClrTx/>
+                <a:buSzTx/>
+                <a:buFontTx/>
+                <a:buNone/>
+                <a:tabLst/>
+                <a:defRPr/>
+              </a:pPr>
               <a:t>6</a:t>
             </a:fld>
-            <a:endParaRPr lang="en-US"/>
+            <a:endParaRPr kumimoji="0" lang="en-US" sz="1800" b="0" i="0" u="none" strike="noStrike" kern="1200" cap="none" spc="0" normalizeH="0" baseline="0" noProof="0">
+              <a:ln>
+                <a:noFill/>
+              </a:ln>
+              <a:solidFill>
+                <a:prstClr val="black"/>
+              </a:solidFill>
+              <a:effectLst/>
+              <a:uLnTx/>
+              <a:uFillTx/>
+              <a:latin typeface="맑은 고딕" panose="020F0502020204030204"/>
+              <a:ea typeface="+mn-ea"/>
+              <a:cs typeface="+mn-cs"/>
+            </a:endParaRPr>
           </a:p>
         </p:txBody>
       </p:sp>
     </p:spTree>
     <p:extLst>
       <p:ext uri="{BB962C8B-B14F-4D97-AF65-F5344CB8AC3E}">
-        <p14:creationId xmlns:p14="http://schemas.microsoft.com/office/powerpoint/2010/main" val="1024086991"/>
+        <p14:creationId xmlns:p14="http://schemas.microsoft.com/office/powerpoint/2010/main" val="3201350354"/>
       </p:ext>
     </p:extLst>
   </p:cSld>
@@ -2695,6 +2840,926 @@
 
 <file path=ppt/slides/slide10.xml><?xml version="1.0" encoding="utf-8"?>
 <p:sld xmlns:a="http://schemas.openxmlformats.org/drawingml/2006/main" xmlns:r="http://schemas.openxmlformats.org/officeDocument/2006/relationships" xmlns:p="http://schemas.openxmlformats.org/presentationml/2006/main">
+  <p:cSld name="Slide 8">
+    <p:bg>
+      <p:bgPr>
+        <a:solidFill>
+          <a:srgbClr val="070D08"/>
+        </a:solidFill>
+        <a:effectLst/>
+      </p:bgPr>
+    </p:bg>
+    <p:spTree>
+      <p:nvGrpSpPr>
+        <p:cNvPr id="1" name=""/>
+        <p:cNvGrpSpPr/>
+        <p:nvPr/>
+      </p:nvGrpSpPr>
+      <p:grpSpPr>
+        <a:xfrm>
+          <a:off x="0" y="0"/>
+          <a:ext cx="0" cy="0"/>
+          <a:chOff x="0" y="0"/>
+          <a:chExt cx="0" cy="0"/>
+        </a:xfrm>
+      </p:grpSpPr>
+      <p:sp>
+        <p:nvSpPr>
+          <p:cNvPr id="2" name="Text 0"/>
+          <p:cNvSpPr/>
+          <p:nvPr/>
+        </p:nvSpPr>
+        <p:spPr>
+          <a:xfrm>
+            <a:off x="640080" y="457200"/>
+            <a:ext cx="7315200" cy="320040"/>
+          </a:xfrm>
+          <a:prstGeom prst="rect">
+            <a:avLst/>
+          </a:prstGeom>
+          <a:noFill/>
+          <a:ln/>
+        </p:spPr>
+        <p:txBody>
+          <a:bodyPr wrap="square" lIns="0" tIns="0" rIns="0" bIns="0" rtlCol="0" anchor="ctr"/>
+          <a:lstStyle/>
+          <a:p>
+            <a:pPr marL="0" indent="0">
+              <a:buNone/>
+            </a:pPr>
+            <a:r>
+              <a:rPr lang="en-US" sz="1200" b="1" kern="0" spc="300" dirty="0">
+                <a:solidFill>
+                  <a:srgbClr val="17C93B"/>
+                </a:solidFill>
+                <a:latin typeface="Courier New" pitchFamily="34" charset="0"/>
+                <a:ea typeface="Courier New" pitchFamily="34" charset="-122"/>
+                <a:cs typeface="Courier New" pitchFamily="34" charset="-120"/>
+              </a:rPr>
+              <a:t>1라운드 · 원인</a:t>
+            </a:r>
+            <a:endParaRPr lang="en-US" sz="1200" dirty="0"/>
+          </a:p>
+        </p:txBody>
+      </p:sp>
+      <p:sp>
+        <p:nvSpPr>
+          <p:cNvPr id="3" name="Text 1"/>
+          <p:cNvSpPr/>
+          <p:nvPr/>
+        </p:nvSpPr>
+        <p:spPr>
+          <a:xfrm>
+            <a:off x="640080" y="749808"/>
+            <a:ext cx="10881360" cy="822960"/>
+          </a:xfrm>
+          <a:prstGeom prst="rect">
+            <a:avLst/>
+          </a:prstGeom>
+          <a:noFill/>
+          <a:ln/>
+        </p:spPr>
+        <p:txBody>
+          <a:bodyPr wrap="square" lIns="0" tIns="0" rIns="0" bIns="0" rtlCol="0" anchor="ctr"/>
+          <a:lstStyle/>
+          <a:p>
+            <a:pPr marL="0" indent="0">
+              <a:lnSpc>
+                <a:spcPct val="105000"/>
+              </a:lnSpc>
+              <a:buNone/>
+            </a:pPr>
+            <a:r>
+              <a:rPr lang="en-US" sz="3000" b="1" dirty="0">
+                <a:solidFill>
+                  <a:srgbClr val="FFFFFF"/>
+                </a:solidFill>
+                <a:latin typeface="Cambria" pitchFamily="34" charset="0"/>
+                <a:ea typeface="Cambria" pitchFamily="34" charset="-122"/>
+                <a:cs typeface="Cambria" pitchFamily="34" charset="-120"/>
+              </a:rPr>
+              <a:t>AI로 딸깍, 그런데 열려 있었다</a:t>
+            </a:r>
+            <a:endParaRPr lang="en-US" sz="3000" dirty="0"/>
+          </a:p>
+        </p:txBody>
+      </p:sp>
+      <p:sp>
+        <p:nvSpPr>
+          <p:cNvPr id="4" name="Shape 2"/>
+          <p:cNvSpPr/>
+          <p:nvPr/>
+        </p:nvSpPr>
+        <p:spPr>
+          <a:xfrm>
+            <a:off x="640080" y="2377440"/>
+            <a:ext cx="2331720" cy="2103120"/>
+          </a:xfrm>
+          <a:prstGeom prst="roundRect">
+            <a:avLst>
+              <a:gd name="adj" fmla="val 3478"/>
+            </a:avLst>
+          </a:prstGeom>
+          <a:solidFill>
+            <a:srgbClr val="0E1A0F"/>
+          </a:solidFill>
+          <a:ln w="9525">
+            <a:solidFill>
+              <a:srgbClr val="17431F"/>
+            </a:solidFill>
+            <a:prstDash val="solid"/>
+          </a:ln>
+          <a:effectLst>
+            <a:outerShdw blurRad="101600" dist="38100" dir="5400000" algn="bl" rotWithShape="0">
+              <a:srgbClr val="000000">
+                <a:alpha val="50000"/>
+              </a:srgbClr>
+            </a:outerShdw>
+          </a:effectLst>
+        </p:spPr>
+      </p:sp>
+      <p:sp>
+        <p:nvSpPr>
+          <p:cNvPr id="5" name="Shape 3"/>
+          <p:cNvSpPr/>
+          <p:nvPr/>
+        </p:nvSpPr>
+        <p:spPr>
+          <a:xfrm>
+            <a:off x="1485900" y="2697480"/>
+            <a:ext cx="640080" cy="640080"/>
+          </a:xfrm>
+          <a:prstGeom prst="ellipse">
+            <a:avLst/>
+          </a:prstGeom>
+          <a:solidFill>
+            <a:srgbClr val="0E4419"/>
+          </a:solidFill>
+          <a:ln w="12700">
+            <a:solidFill>
+              <a:srgbClr val="17431F"/>
+            </a:solidFill>
+            <a:prstDash val="solid"/>
+          </a:ln>
+        </p:spPr>
+      </p:sp>
+      <p:pic>
+        <p:nvPicPr>
+          <p:cNvPr id="6" name="Image 0" descr="preencoded.png"/>
+          <p:cNvPicPr>
+            <a:picLocks noChangeAspect="1"/>
+          </p:cNvPicPr>
+          <p:nvPr/>
+        </p:nvPicPr>
+        <p:blipFill>
+          <a:blip r:embed="rId3"/>
+          <a:stretch>
+            <a:fillRect/>
+          </a:stretch>
+        </p:blipFill>
+        <p:spPr>
+          <a:xfrm>
+            <a:off x="1569110" y="2780690"/>
+            <a:ext cx="473659" cy="473659"/>
+          </a:xfrm>
+          <a:prstGeom prst="rect">
+            <a:avLst/>
+          </a:prstGeom>
+        </p:spPr>
+      </p:pic>
+      <p:sp>
+        <p:nvSpPr>
+          <p:cNvPr id="7" name="Text 4"/>
+          <p:cNvSpPr/>
+          <p:nvPr/>
+        </p:nvSpPr>
+        <p:spPr>
+          <a:xfrm>
+            <a:off x="777240" y="3474720"/>
+            <a:ext cx="2057400" cy="457200"/>
+          </a:xfrm>
+          <a:prstGeom prst="rect">
+            <a:avLst/>
+          </a:prstGeom>
+          <a:noFill/>
+          <a:ln/>
+        </p:spPr>
+        <p:txBody>
+          <a:bodyPr wrap="square" lIns="0" tIns="0" rIns="0" bIns="0" rtlCol="0" anchor="ctr"/>
+          <a:lstStyle/>
+          <a:p>
+            <a:pPr marL="0" indent="0" algn="ctr">
+              <a:buNone/>
+            </a:pPr>
+            <a:r>
+              <a:rPr lang="en-US" sz="1300" b="1" dirty="0">
+                <a:solidFill>
+                  <a:srgbClr val="E9F7EC"/>
+                </a:solidFill>
+                <a:latin typeface="Calibri" pitchFamily="34" charset="0"/>
+                <a:ea typeface="Calibri" pitchFamily="34" charset="-122"/>
+                <a:cs typeface="Calibri" pitchFamily="34" charset="-120"/>
+              </a:rPr>
+              <a:t>F12 개발자 도구</a:t>
+            </a:r>
+            <a:endParaRPr lang="en-US" sz="1300" dirty="0"/>
+          </a:p>
+        </p:txBody>
+      </p:sp>
+      <p:sp>
+        <p:nvSpPr>
+          <p:cNvPr id="8" name="Text 5"/>
+          <p:cNvSpPr/>
+          <p:nvPr/>
+        </p:nvSpPr>
+        <p:spPr>
+          <a:xfrm>
+            <a:off x="777240" y="3913632"/>
+            <a:ext cx="2057400" cy="502920"/>
+          </a:xfrm>
+          <a:prstGeom prst="rect">
+            <a:avLst/>
+          </a:prstGeom>
+          <a:noFill/>
+          <a:ln/>
+        </p:spPr>
+        <p:txBody>
+          <a:bodyPr wrap="square" lIns="0" tIns="0" rIns="0" bIns="0" rtlCol="0" anchor="ctr"/>
+          <a:lstStyle/>
+          <a:p>
+            <a:pPr marL="0" indent="0" algn="ctr">
+              <a:lnSpc>
+                <a:spcPct val="120000"/>
+              </a:lnSpc>
+              <a:buNone/>
+            </a:pPr>
+            <a:r>
+              <a:rPr lang="en-US" sz="1050" dirty="0">
+                <a:solidFill>
+                  <a:srgbClr val="6E9679"/>
+                </a:solidFill>
+                <a:latin typeface="Calibri" pitchFamily="34" charset="0"/>
+                <a:ea typeface="Calibri" pitchFamily="34" charset="-122"/>
+                <a:cs typeface="Calibri" pitchFamily="34" charset="-120"/>
+              </a:rPr>
+              <a:t>네트워크 탭에 요청이 그대로</a:t>
+            </a:r>
+            <a:endParaRPr lang="en-US" sz="1050" dirty="0"/>
+          </a:p>
+        </p:txBody>
+      </p:sp>
+      <p:sp>
+        <p:nvSpPr>
+          <p:cNvPr id="9" name="Shape 6"/>
+          <p:cNvSpPr/>
+          <p:nvPr/>
+        </p:nvSpPr>
+        <p:spPr>
+          <a:xfrm>
+            <a:off x="3026664" y="3429000"/>
+            <a:ext cx="418490" cy="9144"/>
+          </a:xfrm>
+          <a:prstGeom prst="line">
+            <a:avLst/>
+          </a:prstGeom>
+          <a:noFill/>
+          <a:ln w="19050">
+            <a:solidFill>
+              <a:srgbClr val="17C93B"/>
+            </a:solidFill>
+            <a:prstDash val="solid"/>
+            <a:tailEnd type="triangle"/>
+          </a:ln>
+        </p:spPr>
+      </p:sp>
+      <p:sp>
+        <p:nvSpPr>
+          <p:cNvPr id="10" name="Shape 7"/>
+          <p:cNvSpPr/>
+          <p:nvPr/>
+        </p:nvSpPr>
+        <p:spPr>
+          <a:xfrm>
+            <a:off x="3500018" y="2377440"/>
+            <a:ext cx="2331720" cy="2103120"/>
+          </a:xfrm>
+          <a:prstGeom prst="roundRect">
+            <a:avLst>
+              <a:gd name="adj" fmla="val 3478"/>
+            </a:avLst>
+          </a:prstGeom>
+          <a:solidFill>
+            <a:srgbClr val="0E1A0F"/>
+          </a:solidFill>
+          <a:ln w="9525">
+            <a:solidFill>
+              <a:srgbClr val="17431F"/>
+            </a:solidFill>
+            <a:prstDash val="solid"/>
+          </a:ln>
+          <a:effectLst>
+            <a:outerShdw blurRad="101600" dist="38100" dir="5400000" algn="bl" rotWithShape="0">
+              <a:srgbClr val="000000">
+                <a:alpha val="50000"/>
+              </a:srgbClr>
+            </a:outerShdw>
+          </a:effectLst>
+        </p:spPr>
+      </p:sp>
+      <p:sp>
+        <p:nvSpPr>
+          <p:cNvPr id="11" name="Shape 8"/>
+          <p:cNvSpPr/>
+          <p:nvPr/>
+        </p:nvSpPr>
+        <p:spPr>
+          <a:xfrm>
+            <a:off x="4345838" y="2697480"/>
+            <a:ext cx="640080" cy="640080"/>
+          </a:xfrm>
+          <a:prstGeom prst="ellipse">
+            <a:avLst/>
+          </a:prstGeom>
+          <a:solidFill>
+            <a:srgbClr val="0E4419"/>
+          </a:solidFill>
+          <a:ln w="12700">
+            <a:solidFill>
+              <a:srgbClr val="17431F"/>
+            </a:solidFill>
+            <a:prstDash val="solid"/>
+          </a:ln>
+        </p:spPr>
+      </p:sp>
+      <p:pic>
+        <p:nvPicPr>
+          <p:cNvPr id="12" name="Image 1" descr="preencoded.png"/>
+          <p:cNvPicPr>
+            <a:picLocks noChangeAspect="1"/>
+          </p:cNvPicPr>
+          <p:nvPr/>
+        </p:nvPicPr>
+        <p:blipFill>
+          <a:blip r:embed="rId4"/>
+          <a:stretch>
+            <a:fillRect/>
+          </a:stretch>
+        </p:blipFill>
+        <p:spPr>
+          <a:xfrm>
+            <a:off x="4429049" y="2780690"/>
+            <a:ext cx="473659" cy="473659"/>
+          </a:xfrm>
+          <a:prstGeom prst="rect">
+            <a:avLst/>
+          </a:prstGeom>
+        </p:spPr>
+      </p:pic>
+      <p:sp>
+        <p:nvSpPr>
+          <p:cNvPr id="13" name="Text 9"/>
+          <p:cNvSpPr/>
+          <p:nvPr/>
+        </p:nvSpPr>
+        <p:spPr>
+          <a:xfrm>
+            <a:off x="3637178" y="3474720"/>
+            <a:ext cx="2057400" cy="457200"/>
+          </a:xfrm>
+          <a:prstGeom prst="rect">
+            <a:avLst/>
+          </a:prstGeom>
+          <a:noFill/>
+          <a:ln/>
+        </p:spPr>
+        <p:txBody>
+          <a:bodyPr wrap="square" lIns="0" tIns="0" rIns="0" bIns="0" rtlCol="0" anchor="ctr"/>
+          <a:lstStyle/>
+          <a:p>
+            <a:pPr marL="0" indent="0" algn="ctr">
+              <a:buNone/>
+            </a:pPr>
+            <a:r>
+              <a:rPr lang="en-US" sz="1300" b="1" dirty="0">
+                <a:solidFill>
+                  <a:srgbClr val="E9F7EC"/>
+                </a:solidFill>
+                <a:latin typeface="Calibri" pitchFamily="34" charset="0"/>
+                <a:ea typeface="Calibri" pitchFamily="34" charset="-122"/>
+                <a:cs typeface="Calibri" pitchFamily="34" charset="-120"/>
+              </a:rPr>
+              <a:t>API 키·DB URL 노출</a:t>
+            </a:r>
+            <a:endParaRPr lang="en-US" sz="1300" dirty="0"/>
+          </a:p>
+        </p:txBody>
+      </p:sp>
+      <p:sp>
+        <p:nvSpPr>
+          <p:cNvPr id="14" name="Text 10"/>
+          <p:cNvSpPr/>
+          <p:nvPr/>
+        </p:nvSpPr>
+        <p:spPr>
+          <a:xfrm>
+            <a:off x="3637178" y="3913632"/>
+            <a:ext cx="2057400" cy="502920"/>
+          </a:xfrm>
+          <a:prstGeom prst="rect">
+            <a:avLst/>
+          </a:prstGeom>
+          <a:noFill/>
+          <a:ln/>
+        </p:spPr>
+        <p:txBody>
+          <a:bodyPr wrap="square" lIns="0" tIns="0" rIns="0" bIns="0" rtlCol="0" anchor="ctr"/>
+          <a:lstStyle/>
+          <a:p>
+            <a:pPr marL="0" indent="0" algn="ctr">
+              <a:lnSpc>
+                <a:spcPct val="120000"/>
+              </a:lnSpc>
+              <a:buNone/>
+            </a:pPr>
+            <a:r>
+              <a:rPr lang="en-US" sz="1050" dirty="0">
+                <a:solidFill>
+                  <a:srgbClr val="6E9679"/>
+                </a:solidFill>
+                <a:latin typeface="Calibri" pitchFamily="34" charset="0"/>
+                <a:ea typeface="Calibri" pitchFamily="34" charset="-122"/>
+                <a:cs typeface="Calibri" pitchFamily="34" charset="-120"/>
+              </a:rPr>
+              <a:t>Firebase 설정이 코드에 그대로</a:t>
+            </a:r>
+            <a:endParaRPr lang="en-US" sz="1050" dirty="0"/>
+          </a:p>
+        </p:txBody>
+      </p:sp>
+      <p:sp>
+        <p:nvSpPr>
+          <p:cNvPr id="15" name="Shape 11"/>
+          <p:cNvSpPr/>
+          <p:nvPr/>
+        </p:nvSpPr>
+        <p:spPr>
+          <a:xfrm>
+            <a:off x="5886602" y="3429000"/>
+            <a:ext cx="418490" cy="9144"/>
+          </a:xfrm>
+          <a:prstGeom prst="line">
+            <a:avLst/>
+          </a:prstGeom>
+          <a:noFill/>
+          <a:ln w="19050">
+            <a:solidFill>
+              <a:srgbClr val="17C93B"/>
+            </a:solidFill>
+            <a:prstDash val="solid"/>
+            <a:tailEnd type="triangle"/>
+          </a:ln>
+        </p:spPr>
+      </p:sp>
+      <p:sp>
+        <p:nvSpPr>
+          <p:cNvPr id="16" name="Shape 12"/>
+          <p:cNvSpPr/>
+          <p:nvPr/>
+        </p:nvSpPr>
+        <p:spPr>
+          <a:xfrm>
+            <a:off x="6359957" y="2377440"/>
+            <a:ext cx="2331720" cy="2103120"/>
+          </a:xfrm>
+          <a:prstGeom prst="roundRect">
+            <a:avLst>
+              <a:gd name="adj" fmla="val 3478"/>
+            </a:avLst>
+          </a:prstGeom>
+          <a:solidFill>
+            <a:srgbClr val="0E1A0F"/>
+          </a:solidFill>
+          <a:ln w="9525">
+            <a:solidFill>
+              <a:srgbClr val="17431F"/>
+            </a:solidFill>
+            <a:prstDash val="solid"/>
+          </a:ln>
+          <a:effectLst>
+            <a:outerShdw blurRad="101600" dist="38100" dir="5400000" algn="bl" rotWithShape="0">
+              <a:srgbClr val="000000">
+                <a:alpha val="50000"/>
+              </a:srgbClr>
+            </a:outerShdw>
+          </a:effectLst>
+        </p:spPr>
+      </p:sp>
+      <p:sp>
+        <p:nvSpPr>
+          <p:cNvPr id="17" name="Shape 13"/>
+          <p:cNvSpPr/>
+          <p:nvPr/>
+        </p:nvSpPr>
+        <p:spPr>
+          <a:xfrm>
+            <a:off x="7205777" y="2697480"/>
+            <a:ext cx="640080" cy="640080"/>
+          </a:xfrm>
+          <a:prstGeom prst="ellipse">
+            <a:avLst/>
+          </a:prstGeom>
+          <a:solidFill>
+            <a:srgbClr val="0E4419"/>
+          </a:solidFill>
+          <a:ln w="12700">
+            <a:solidFill>
+              <a:srgbClr val="17431F"/>
+            </a:solidFill>
+            <a:prstDash val="solid"/>
+          </a:ln>
+        </p:spPr>
+      </p:sp>
+      <p:pic>
+        <p:nvPicPr>
+          <p:cNvPr id="18" name="Image 2" descr="preencoded.png"/>
+          <p:cNvPicPr>
+            <a:picLocks noChangeAspect="1"/>
+          </p:cNvPicPr>
+          <p:nvPr/>
+        </p:nvPicPr>
+        <p:blipFill>
+          <a:blip r:embed="rId5"/>
+          <a:stretch>
+            <a:fillRect/>
+          </a:stretch>
+        </p:blipFill>
+        <p:spPr>
+          <a:xfrm>
+            <a:off x="7288987" y="2780690"/>
+            <a:ext cx="473659" cy="473659"/>
+          </a:xfrm>
+          <a:prstGeom prst="rect">
+            <a:avLst/>
+          </a:prstGeom>
+        </p:spPr>
+      </p:pic>
+      <p:sp>
+        <p:nvSpPr>
+          <p:cNvPr id="19" name="Text 14"/>
+          <p:cNvSpPr/>
+          <p:nvPr/>
+        </p:nvSpPr>
+        <p:spPr>
+          <a:xfrm>
+            <a:off x="6497117" y="3474720"/>
+            <a:ext cx="2057400" cy="457200"/>
+          </a:xfrm>
+          <a:prstGeom prst="rect">
+            <a:avLst/>
+          </a:prstGeom>
+          <a:noFill/>
+          <a:ln/>
+        </p:spPr>
+        <p:txBody>
+          <a:bodyPr wrap="square" lIns="0" tIns="0" rIns="0" bIns="0" rtlCol="0" anchor="ctr"/>
+          <a:lstStyle/>
+          <a:p>
+            <a:pPr marL="0" indent="0" algn="ctr">
+              <a:buNone/>
+            </a:pPr>
+            <a:r>
+              <a:rPr lang="en-US" sz="1300" b="1" dirty="0">
+                <a:solidFill>
+                  <a:srgbClr val="E9F7EC"/>
+                </a:solidFill>
+                <a:latin typeface="Calibri" pitchFamily="34" charset="0"/>
+                <a:ea typeface="Calibri" pitchFamily="34" charset="-122"/>
+                <a:cs typeface="Calibri" pitchFamily="34" charset="-120"/>
+              </a:rPr>
+              <a:t>Rules 전면 개방</a:t>
+            </a:r>
+            <a:endParaRPr lang="en-US" sz="1300" dirty="0"/>
+          </a:p>
+        </p:txBody>
+      </p:sp>
+      <p:sp>
+        <p:nvSpPr>
+          <p:cNvPr id="20" name="Text 15"/>
+          <p:cNvSpPr/>
+          <p:nvPr/>
+        </p:nvSpPr>
+        <p:spPr>
+          <a:xfrm>
+            <a:off x="6497117" y="3913632"/>
+            <a:ext cx="2057400" cy="502920"/>
+          </a:xfrm>
+          <a:prstGeom prst="rect">
+            <a:avLst/>
+          </a:prstGeom>
+          <a:noFill/>
+          <a:ln/>
+        </p:spPr>
+        <p:txBody>
+          <a:bodyPr wrap="square" lIns="0" tIns="0" rIns="0" bIns="0" rtlCol="0" anchor="ctr"/>
+          <a:lstStyle/>
+          <a:p>
+            <a:pPr marL="0" indent="0" algn="ctr">
+              <a:lnSpc>
+                <a:spcPct val="120000"/>
+              </a:lnSpc>
+              <a:buNone/>
+            </a:pPr>
+            <a:r>
+              <a:rPr lang="en-US" sz="1050" dirty="0">
+                <a:solidFill>
+                  <a:srgbClr val="6E9679"/>
+                </a:solidFill>
+                <a:latin typeface="Calibri" pitchFamily="34" charset="0"/>
+                <a:ea typeface="Calibri" pitchFamily="34" charset="-122"/>
+                <a:cs typeface="Calibri" pitchFamily="34" charset="-120"/>
+              </a:rPr>
+              <a:t>누구나 읽고 쓸 수 있는 상태</a:t>
+            </a:r>
+            <a:endParaRPr lang="en-US" sz="1050" dirty="0"/>
+          </a:p>
+        </p:txBody>
+      </p:sp>
+      <p:sp>
+        <p:nvSpPr>
+          <p:cNvPr id="21" name="Shape 16"/>
+          <p:cNvSpPr/>
+          <p:nvPr/>
+        </p:nvSpPr>
+        <p:spPr>
+          <a:xfrm>
+            <a:off x="8746541" y="3429000"/>
+            <a:ext cx="418490" cy="9144"/>
+          </a:xfrm>
+          <a:prstGeom prst="line">
+            <a:avLst/>
+          </a:prstGeom>
+          <a:noFill/>
+          <a:ln w="19050">
+            <a:solidFill>
+              <a:srgbClr val="17C93B"/>
+            </a:solidFill>
+            <a:prstDash val="solid"/>
+            <a:tailEnd type="triangle"/>
+          </a:ln>
+        </p:spPr>
+      </p:sp>
+      <p:sp>
+        <p:nvSpPr>
+          <p:cNvPr id="22" name="Shape 17"/>
+          <p:cNvSpPr/>
+          <p:nvPr/>
+        </p:nvSpPr>
+        <p:spPr>
+          <a:xfrm>
+            <a:off x="9219895" y="2377440"/>
+            <a:ext cx="2331720" cy="2103120"/>
+          </a:xfrm>
+          <a:prstGeom prst="roundRect">
+            <a:avLst>
+              <a:gd name="adj" fmla="val 3478"/>
+            </a:avLst>
+          </a:prstGeom>
+          <a:solidFill>
+            <a:srgbClr val="3A0F17"/>
+          </a:solidFill>
+          <a:ln w="9525">
+            <a:solidFill>
+              <a:srgbClr val="17431F"/>
+            </a:solidFill>
+            <a:prstDash val="solid"/>
+          </a:ln>
+          <a:effectLst>
+            <a:outerShdw blurRad="101600" dist="38100" dir="5400000" algn="bl" rotWithShape="0">
+              <a:srgbClr val="000000">
+                <a:alpha val="50000"/>
+              </a:srgbClr>
+            </a:outerShdw>
+          </a:effectLst>
+        </p:spPr>
+      </p:sp>
+      <p:sp>
+        <p:nvSpPr>
+          <p:cNvPr id="23" name="Shape 18"/>
+          <p:cNvSpPr/>
+          <p:nvPr/>
+        </p:nvSpPr>
+        <p:spPr>
+          <a:xfrm>
+            <a:off x="10065715" y="2697480"/>
+            <a:ext cx="640080" cy="640080"/>
+          </a:xfrm>
+          <a:prstGeom prst="ellipse">
+            <a:avLst/>
+          </a:prstGeom>
+          <a:solidFill>
+            <a:srgbClr val="3A0F17"/>
+          </a:solidFill>
+          <a:ln w="12700">
+            <a:solidFill>
+              <a:srgbClr val="3A0F17"/>
+            </a:solidFill>
+            <a:prstDash val="solid"/>
+          </a:ln>
+        </p:spPr>
+      </p:sp>
+      <p:pic>
+        <p:nvPicPr>
+          <p:cNvPr id="24" name="Image 3" descr="preencoded.png"/>
+          <p:cNvPicPr>
+            <a:picLocks noChangeAspect="1"/>
+          </p:cNvPicPr>
+          <p:nvPr/>
+        </p:nvPicPr>
+        <p:blipFill>
+          <a:blip r:embed="rId6"/>
+          <a:stretch>
+            <a:fillRect/>
+          </a:stretch>
+        </p:blipFill>
+        <p:spPr>
+          <a:xfrm>
+            <a:off x="10148926" y="2780690"/>
+            <a:ext cx="473659" cy="473659"/>
+          </a:xfrm>
+          <a:prstGeom prst="rect">
+            <a:avLst/>
+          </a:prstGeom>
+        </p:spPr>
+      </p:pic>
+      <p:sp>
+        <p:nvSpPr>
+          <p:cNvPr id="25" name="Text 19"/>
+          <p:cNvSpPr/>
+          <p:nvPr/>
+        </p:nvSpPr>
+        <p:spPr>
+          <a:xfrm>
+            <a:off x="9357055" y="3474720"/>
+            <a:ext cx="2057400" cy="457200"/>
+          </a:xfrm>
+          <a:prstGeom prst="rect">
+            <a:avLst/>
+          </a:prstGeom>
+          <a:noFill/>
+          <a:ln/>
+        </p:spPr>
+        <p:txBody>
+          <a:bodyPr wrap="square" lIns="0" tIns="0" rIns="0" bIns="0" rtlCol="0" anchor="ctr"/>
+          <a:lstStyle/>
+          <a:p>
+            <a:pPr marL="0" indent="0" algn="ctr">
+              <a:buNone/>
+            </a:pPr>
+            <a:r>
+              <a:rPr lang="en-US" sz="1300" b="1" dirty="0">
+                <a:solidFill>
+                  <a:srgbClr val="E9F7EC"/>
+                </a:solidFill>
+                <a:latin typeface="Calibri" pitchFamily="34" charset="0"/>
+                <a:ea typeface="Calibri" pitchFamily="34" charset="-122"/>
+                <a:cs typeface="Calibri" pitchFamily="34" charset="-120"/>
+              </a:rPr>
+              <a:t>DB 직접 접근</a:t>
+            </a:r>
+            <a:endParaRPr lang="en-US" sz="1300" dirty="0"/>
+          </a:p>
+        </p:txBody>
+      </p:sp>
+      <p:sp>
+        <p:nvSpPr>
+          <p:cNvPr id="26" name="Text 20"/>
+          <p:cNvSpPr/>
+          <p:nvPr/>
+        </p:nvSpPr>
+        <p:spPr>
+          <a:xfrm>
+            <a:off x="9357055" y="3913632"/>
+            <a:ext cx="2057400" cy="502920"/>
+          </a:xfrm>
+          <a:prstGeom prst="rect">
+            <a:avLst/>
+          </a:prstGeom>
+          <a:noFill/>
+          <a:ln/>
+        </p:spPr>
+        <p:txBody>
+          <a:bodyPr wrap="square" lIns="0" tIns="0" rIns="0" bIns="0" rtlCol="0" anchor="ctr"/>
+          <a:lstStyle/>
+          <a:p>
+            <a:pPr marL="0" indent="0" algn="ctr">
+              <a:lnSpc>
+                <a:spcPct val="120000"/>
+              </a:lnSpc>
+              <a:buNone/>
+            </a:pPr>
+            <a:r>
+              <a:rPr lang="en-US" sz="1050" dirty="0">
+                <a:solidFill>
+                  <a:srgbClr val="6E9679"/>
+                </a:solidFill>
+                <a:latin typeface="Calibri" pitchFamily="34" charset="0"/>
+                <a:ea typeface="Calibri" pitchFamily="34" charset="-122"/>
+                <a:cs typeface="Calibri" pitchFamily="34" charset="-120"/>
+              </a:rPr>
+              <a:t>학생이 Firebase에 곧장 기록</a:t>
+            </a:r>
+            <a:endParaRPr lang="en-US" sz="1050" dirty="0"/>
+          </a:p>
+        </p:txBody>
+      </p:sp>
+      <p:sp>
+        <p:nvSpPr>
+          <p:cNvPr id="27" name="Text 21"/>
+          <p:cNvSpPr/>
+          <p:nvPr/>
+        </p:nvSpPr>
+        <p:spPr>
+          <a:xfrm>
+            <a:off x="640080" y="5120640"/>
+            <a:ext cx="10058400" cy="457200"/>
+          </a:xfrm>
+          <a:prstGeom prst="rect">
+            <a:avLst/>
+          </a:prstGeom>
+          <a:noFill/>
+          <a:ln/>
+        </p:spPr>
+        <p:txBody>
+          <a:bodyPr wrap="square" lIns="0" tIns="0" rIns="0" bIns="0" rtlCol="0" anchor="ctr"/>
+          <a:lstStyle/>
+          <a:p>
+            <a:pPr marL="0" indent="0">
+              <a:buNone/>
+            </a:pPr>
+            <a:r>
+              <a:rPr lang="en-US" sz="1500" i="1" dirty="0">
+                <a:solidFill>
+                  <a:srgbClr val="17C93B"/>
+                </a:solidFill>
+                <a:latin typeface="Calibri" pitchFamily="34" charset="0"/>
+                <a:ea typeface="Calibri" pitchFamily="34" charset="-122"/>
+                <a:cs typeface="Calibri" pitchFamily="34" charset="-120"/>
+              </a:rPr>
+              <a:t>“ 상대는 저와 똑같이 AI를 돌리는 중학생이라는 사실을 간과했다. ”</a:t>
+            </a:r>
+            <a:endParaRPr lang="en-US" sz="1500" dirty="0"/>
+          </a:p>
+        </p:txBody>
+      </p:sp>
+      <p:sp>
+        <p:nvSpPr>
+          <p:cNvPr id="28" name="Text 22"/>
+          <p:cNvSpPr/>
+          <p:nvPr/>
+        </p:nvSpPr>
+        <p:spPr>
+          <a:xfrm>
+            <a:off x="11002975" y="6446520"/>
+            <a:ext cx="914400" cy="274320"/>
+          </a:xfrm>
+          <a:prstGeom prst="rect">
+            <a:avLst/>
+          </a:prstGeom>
+          <a:noFill/>
+          <a:ln/>
+        </p:spPr>
+        <p:txBody>
+          <a:bodyPr wrap="square" lIns="0" tIns="0" rIns="0" bIns="0" rtlCol="0" anchor="ctr"/>
+          <a:lstStyle/>
+          <a:p>
+            <a:pPr marL="0" indent="0" algn="r">
+              <a:buNone/>
+            </a:pPr>
+            <a:r>
+              <a:rPr lang="en-US" sz="900" dirty="0">
+                <a:solidFill>
+                  <a:srgbClr val="6E9679"/>
+                </a:solidFill>
+                <a:latin typeface="Courier New" pitchFamily="34" charset="0"/>
+                <a:ea typeface="Courier New" pitchFamily="34" charset="-122"/>
+                <a:cs typeface="Courier New" pitchFamily="34" charset="-120"/>
+              </a:rPr>
+              <a:t>8 / 20</a:t>
+            </a:r>
+            <a:endParaRPr lang="en-US" sz="900" dirty="0"/>
+          </a:p>
+        </p:txBody>
+      </p:sp>
+    </p:spTree>
+  </p:cSld>
+  <p:clrMapOvr>
+    <a:masterClrMapping/>
+  </p:clrMapOvr>
+</p:sld>
+</file>
+
+<file path=ppt/slides/slide11.xml><?xml version="1.0" encoding="utf-8"?>
+<p:sld xmlns:a="http://schemas.openxmlformats.org/drawingml/2006/main" xmlns:r="http://schemas.openxmlformats.org/officeDocument/2006/relationships" xmlns:p="http://schemas.openxmlformats.org/presentationml/2006/main">
   <p:cSld name="Slide 9">
     <p:bg>
       <p:bgPr>
@@ -3360,7 +4425,7 @@
 </p:sld>
 </file>
 
-<file path=ppt/slides/slide11.xml><?xml version="1.0" encoding="utf-8"?>
+<file path=ppt/slides/slide12.xml><?xml version="1.0" encoding="utf-8"?>
 <p:sld xmlns:a="http://schemas.openxmlformats.org/drawingml/2006/main" xmlns:r="http://schemas.openxmlformats.org/officeDocument/2006/relationships" xmlns:p="http://schemas.openxmlformats.org/presentationml/2006/main">
   <p:cSld name="Slide 10">
     <p:bg>
@@ -3621,7 +4686,7 @@
 </p:sld>
 </file>
 
-<file path=ppt/slides/slide12.xml><?xml version="1.0" encoding="utf-8"?>
+<file path=ppt/slides/slide13.xml><?xml version="1.0" encoding="utf-8"?>
 <p:sld xmlns:a="http://schemas.openxmlformats.org/drawingml/2006/main" xmlns:r="http://schemas.openxmlformats.org/officeDocument/2006/relationships" xmlns:p="http://schemas.openxmlformats.org/presentationml/2006/main">
   <p:cSld name="Slide 11">
     <p:bg>
@@ -4286,7 +5351,7 @@
 </p:sld>
 </file>
 
-<file path=ppt/slides/slide13.xml><?xml version="1.0" encoding="utf-8"?>
+<file path=ppt/slides/slide14.xml><?xml version="1.0" encoding="utf-8"?>
 <p:sld xmlns:a="http://schemas.openxmlformats.org/drawingml/2006/main" xmlns:r="http://schemas.openxmlformats.org/officeDocument/2006/relationships" xmlns:p="http://schemas.openxmlformats.org/presentationml/2006/main">
   <p:cSld name="Slide 12">
     <p:bg>
@@ -4985,7 +6050,7 @@
 </p:sld>
 </file>
 
-<file path=ppt/slides/slide14.xml><?xml version="1.0" encoding="utf-8"?>
+<file path=ppt/slides/slide15.xml><?xml version="1.0" encoding="utf-8"?>
 <p:sld xmlns:a="http://schemas.openxmlformats.org/drawingml/2006/main" xmlns:r="http://schemas.openxmlformats.org/officeDocument/2006/relationships" xmlns:p="http://schemas.openxmlformats.org/presentationml/2006/main">
   <p:cSld name="Slide 13">
     <p:bg>
@@ -5894,7 +6959,7 @@
 </p:sld>
 </file>
 
-<file path=ppt/slides/slide15.xml><?xml version="1.0" encoding="utf-8"?>
+<file path=ppt/slides/slide16.xml><?xml version="1.0" encoding="utf-8"?>
 <p:sld xmlns:a="http://schemas.openxmlformats.org/drawingml/2006/main" xmlns:r="http://schemas.openxmlformats.org/officeDocument/2006/relationships" xmlns:p="http://schemas.openxmlformats.org/presentationml/2006/main">
   <p:cSld name="Slide 14">
     <p:bg>
@@ -6320,7 +7385,7 @@
 </p:sld>
 </file>
 
-<file path=ppt/slides/slide16.xml><?xml version="1.0" encoding="utf-8"?>
+<file path=ppt/slides/slide17.xml><?xml version="1.0" encoding="utf-8"?>
 <p:sld xmlns:a="http://schemas.openxmlformats.org/drawingml/2006/main" xmlns:r="http://schemas.openxmlformats.org/officeDocument/2006/relationships" xmlns:p="http://schemas.openxmlformats.org/presentationml/2006/main">
   <p:cSld name="Slide 15">
     <p:bg>
@@ -6985,7 +8050,7 @@
 </p:sld>
 </file>
 
-<file path=ppt/slides/slide17.xml><?xml version="1.0" encoding="utf-8"?>
+<file path=ppt/slides/slide18.xml><?xml version="1.0" encoding="utf-8"?>
 <p:sld xmlns:a="http://schemas.openxmlformats.org/drawingml/2006/main" xmlns:r="http://schemas.openxmlformats.org/officeDocument/2006/relationships" xmlns:p="http://schemas.openxmlformats.org/presentationml/2006/main">
   <p:cSld name="Slide 16">
     <p:bg>
@@ -7184,7 +8249,7 @@
 </p:sld>
 </file>
 
-<file path=ppt/slides/slide18.xml><?xml version="1.0" encoding="utf-8"?>
+<file path=ppt/slides/slide19.xml><?xml version="1.0" encoding="utf-8"?>
 <p:sld xmlns:a="http://schemas.openxmlformats.org/drawingml/2006/main" xmlns:r="http://schemas.openxmlformats.org/officeDocument/2006/relationships" xmlns:p="http://schemas.openxmlformats.org/presentationml/2006/main">
   <p:cSld name="Slide 17">
     <p:bg>
@@ -8095,839 +9160,6 @@
                 <a:cs typeface="Courier New" pitchFamily="34" charset="-120"/>
               </a:rPr>
               <a:t>17 / 20</a:t>
-            </a:r>
-            <a:endParaRPr lang="en-US" sz="900" dirty="0"/>
-          </a:p>
-        </p:txBody>
-      </p:sp>
-    </p:spTree>
-  </p:cSld>
-  <p:clrMapOvr>
-    <a:masterClrMapping/>
-  </p:clrMapOvr>
-</p:sld>
-</file>
-
-<file path=ppt/slides/slide19.xml><?xml version="1.0" encoding="utf-8"?>
-<p:sld xmlns:a="http://schemas.openxmlformats.org/drawingml/2006/main" xmlns:r="http://schemas.openxmlformats.org/officeDocument/2006/relationships" xmlns:p="http://schemas.openxmlformats.org/presentationml/2006/main">
-  <p:cSld name="Slide 18">
-    <p:bg>
-      <p:bgPr>
-        <a:solidFill>
-          <a:srgbClr val="070D08"/>
-        </a:solidFill>
-        <a:effectLst/>
-      </p:bgPr>
-    </p:bg>
-    <p:spTree>
-      <p:nvGrpSpPr>
-        <p:cNvPr id="1" name=""/>
-        <p:cNvGrpSpPr/>
-        <p:nvPr/>
-      </p:nvGrpSpPr>
-      <p:grpSpPr>
-        <a:xfrm>
-          <a:off x="0" y="0"/>
-          <a:ext cx="0" cy="0"/>
-          <a:chOff x="0" y="0"/>
-          <a:chExt cx="0" cy="0"/>
-        </a:xfrm>
-      </p:grpSpPr>
-      <p:sp>
-        <p:nvSpPr>
-          <p:cNvPr id="2" name="Text 0"/>
-          <p:cNvSpPr/>
-          <p:nvPr/>
-        </p:nvSpPr>
-        <p:spPr>
-          <a:xfrm>
-            <a:off x="640080" y="457200"/>
-            <a:ext cx="7315200" cy="320040"/>
-          </a:xfrm>
-          <a:prstGeom prst="rect">
-            <a:avLst/>
-          </a:prstGeom>
-          <a:noFill/>
-          <a:ln/>
-        </p:spPr>
-        <p:txBody>
-          <a:bodyPr wrap="square" lIns="0" tIns="0" rIns="0" bIns="0" rtlCol="0" anchor="ctr"/>
-          <a:lstStyle/>
-          <a:p>
-            <a:pPr marL="0" indent="0">
-              <a:buNone/>
-            </a:pPr>
-            <a:r>
-              <a:rPr lang="en-US" sz="1200" b="1" kern="0" spc="300" dirty="0">
-                <a:solidFill>
-                  <a:srgbClr val="17C93B"/>
-                </a:solidFill>
-                <a:latin typeface="Courier New" pitchFamily="34" charset="0"/>
-                <a:ea typeface="Courier New" pitchFamily="34" charset="-122"/>
-                <a:cs typeface="Courier New" pitchFamily="34" charset="-120"/>
-              </a:rPr>
-              <a:t>교육적 의미</a:t>
-            </a:r>
-            <a:endParaRPr lang="en-US" sz="1200" dirty="0"/>
-          </a:p>
-        </p:txBody>
-      </p:sp>
-      <p:sp>
-        <p:nvSpPr>
-          <p:cNvPr id="3" name="Text 1"/>
-          <p:cNvSpPr/>
-          <p:nvPr/>
-        </p:nvSpPr>
-        <p:spPr>
-          <a:xfrm>
-            <a:off x="640080" y="749808"/>
-            <a:ext cx="10881360" cy="822960"/>
-          </a:xfrm>
-          <a:prstGeom prst="rect">
-            <a:avLst/>
-          </a:prstGeom>
-          <a:noFill/>
-          <a:ln/>
-        </p:spPr>
-        <p:txBody>
-          <a:bodyPr wrap="square" lIns="0" tIns="0" rIns="0" bIns="0" rtlCol="0" anchor="ctr"/>
-          <a:lstStyle/>
-          <a:p>
-            <a:pPr marL="0" indent="0">
-              <a:lnSpc>
-                <a:spcPct val="105000"/>
-              </a:lnSpc>
-              <a:buNone/>
-            </a:pPr>
-            <a:r>
-              <a:rPr lang="en-US" sz="3000" b="1" dirty="0">
-                <a:solidFill>
-                  <a:srgbClr val="FFFFFF"/>
-                </a:solidFill>
-                <a:latin typeface="Cambria" pitchFamily="34" charset="0"/>
-                <a:ea typeface="Cambria" pitchFamily="34" charset="-122"/>
-                <a:cs typeface="Cambria" pitchFamily="34" charset="-120"/>
-              </a:rPr>
-              <a:t>공방전이 만든 자기효능감</a:t>
-            </a:r>
-            <a:endParaRPr lang="en-US" sz="3000" dirty="0"/>
-          </a:p>
-        </p:txBody>
-      </p:sp>
-      <p:sp>
-        <p:nvSpPr>
-          <p:cNvPr id="4" name="Shape 2"/>
-          <p:cNvSpPr/>
-          <p:nvPr/>
-        </p:nvSpPr>
-        <p:spPr>
-          <a:xfrm>
-            <a:off x="3749040" y="2651760"/>
-            <a:ext cx="1508760" cy="1508760"/>
-          </a:xfrm>
-          <a:prstGeom prst="line">
-            <a:avLst/>
-          </a:prstGeom>
-          <a:noFill/>
-          <a:ln w="15875">
-            <a:solidFill>
-              <a:srgbClr val="17C93B"/>
-            </a:solidFill>
-            <a:prstDash val="solid"/>
-            <a:tailEnd type="triangle"/>
-          </a:ln>
-        </p:spPr>
-      </p:sp>
-      <p:sp>
-        <p:nvSpPr>
-          <p:cNvPr id="5" name="Shape 3"/>
-          <p:cNvSpPr/>
-          <p:nvPr/>
-        </p:nvSpPr>
-        <p:spPr>
-          <a:xfrm flipH="1">
-            <a:off x="3749040" y="4160520"/>
-            <a:ext cx="1508760" cy="1508760"/>
-          </a:xfrm>
-          <a:prstGeom prst="line">
-            <a:avLst/>
-          </a:prstGeom>
-          <a:noFill/>
-          <a:ln w="15875">
-            <a:solidFill>
-              <a:srgbClr val="17C93B"/>
-            </a:solidFill>
-            <a:prstDash val="solid"/>
-            <a:tailEnd type="triangle"/>
-          </a:ln>
-        </p:spPr>
-      </p:sp>
-      <p:sp>
-        <p:nvSpPr>
-          <p:cNvPr id="6" name="Shape 4"/>
-          <p:cNvSpPr/>
-          <p:nvPr/>
-        </p:nvSpPr>
-        <p:spPr>
-          <a:xfrm flipH="1" flipV="1">
-            <a:off x="2240280" y="4160520"/>
-            <a:ext cx="1508760" cy="1508760"/>
-          </a:xfrm>
-          <a:prstGeom prst="line">
-            <a:avLst/>
-          </a:prstGeom>
-          <a:noFill/>
-          <a:ln w="15875">
-            <a:solidFill>
-              <a:srgbClr val="17C93B"/>
-            </a:solidFill>
-            <a:prstDash val="solid"/>
-            <a:tailEnd type="triangle"/>
-          </a:ln>
-        </p:spPr>
-      </p:sp>
-      <p:sp>
-        <p:nvSpPr>
-          <p:cNvPr id="7" name="Shape 5"/>
-          <p:cNvSpPr/>
-          <p:nvPr/>
-        </p:nvSpPr>
-        <p:spPr>
-          <a:xfrm flipV="1">
-            <a:off x="2240280" y="2651760"/>
-            <a:ext cx="1508760" cy="1508760"/>
-          </a:xfrm>
-          <a:prstGeom prst="line">
-            <a:avLst/>
-          </a:prstGeom>
-          <a:noFill/>
-          <a:ln w="15875">
-            <a:solidFill>
-              <a:srgbClr val="17C93B"/>
-            </a:solidFill>
-            <a:prstDash val="solid"/>
-            <a:tailEnd type="triangle"/>
-          </a:ln>
-        </p:spPr>
-      </p:sp>
-      <p:sp>
-        <p:nvSpPr>
-          <p:cNvPr id="8" name="Shape 6"/>
-          <p:cNvSpPr/>
-          <p:nvPr/>
-        </p:nvSpPr>
-        <p:spPr>
-          <a:xfrm>
-            <a:off x="3383280" y="2286000"/>
-            <a:ext cx="731520" cy="731520"/>
-          </a:xfrm>
-          <a:prstGeom prst="ellipse">
-            <a:avLst/>
-          </a:prstGeom>
-          <a:solidFill>
-            <a:srgbClr val="0E4419"/>
-          </a:solidFill>
-          <a:ln w="12700">
-            <a:solidFill>
-              <a:srgbClr val="17431F"/>
-            </a:solidFill>
-            <a:prstDash val="solid"/>
-          </a:ln>
-        </p:spPr>
-      </p:sp>
-      <p:pic>
-        <p:nvPicPr>
-          <p:cNvPr id="9" name="Image 0" descr="preencoded.png"/>
-          <p:cNvPicPr>
-            <a:picLocks noChangeAspect="1"/>
-          </p:cNvPicPr>
-          <p:nvPr/>
-        </p:nvPicPr>
-        <p:blipFill>
-          <a:blip r:embed="rId3"/>
-          <a:stretch>
-            <a:fillRect/>
-          </a:stretch>
-        </p:blipFill>
-        <p:spPr>
-          <a:xfrm>
-            <a:off x="3478378" y="2381098"/>
-            <a:ext cx="541325" cy="541325"/>
-          </a:xfrm>
-          <a:prstGeom prst="rect">
-            <a:avLst/>
-          </a:prstGeom>
-        </p:spPr>
-      </p:pic>
-      <p:sp>
-        <p:nvSpPr>
-          <p:cNvPr id="10" name="Text 7"/>
-          <p:cNvSpPr/>
-          <p:nvPr/>
-        </p:nvSpPr>
-        <p:spPr>
-          <a:xfrm>
-            <a:off x="2697480" y="3035808"/>
-            <a:ext cx="2103120" cy="320040"/>
-          </a:xfrm>
-          <a:prstGeom prst="rect">
-            <a:avLst/>
-          </a:prstGeom>
-          <a:noFill/>
-          <a:ln/>
-        </p:spPr>
-        <p:txBody>
-          <a:bodyPr wrap="square" lIns="0" tIns="0" rIns="0" bIns="0" rtlCol="0" anchor="ctr"/>
-          <a:lstStyle/>
-          <a:p>
-            <a:pPr marL="0" indent="0" algn="ctr">
-              <a:buNone/>
-            </a:pPr>
-            <a:r>
-              <a:rPr lang="en-US" sz="1100" b="1" dirty="0">
-                <a:solidFill>
-                  <a:srgbClr val="E9F7EC"/>
-                </a:solidFill>
-                <a:latin typeface="Calibri" pitchFamily="34" charset="0"/>
-                <a:ea typeface="Calibri" pitchFamily="34" charset="-122"/>
-                <a:cs typeface="Calibri" pitchFamily="34" charset="-120"/>
-              </a:rPr>
-              <a:t>선생님이 막는다</a:t>
-            </a:r>
-            <a:endParaRPr lang="en-US" sz="1100" dirty="0"/>
-          </a:p>
-        </p:txBody>
-      </p:sp>
-      <p:sp>
-        <p:nvSpPr>
-          <p:cNvPr id="11" name="Shape 8"/>
-          <p:cNvSpPr/>
-          <p:nvPr/>
-        </p:nvSpPr>
-        <p:spPr>
-          <a:xfrm>
-            <a:off x="4892040" y="3794760"/>
-            <a:ext cx="731520" cy="731520"/>
-          </a:xfrm>
-          <a:prstGeom prst="ellipse">
-            <a:avLst/>
-          </a:prstGeom>
-          <a:solidFill>
-            <a:srgbClr val="0E4419"/>
-          </a:solidFill>
-          <a:ln w="12700">
-            <a:solidFill>
-              <a:srgbClr val="17431F"/>
-            </a:solidFill>
-            <a:prstDash val="solid"/>
-          </a:ln>
-        </p:spPr>
-      </p:sp>
-      <p:pic>
-        <p:nvPicPr>
-          <p:cNvPr id="12" name="Image 1" descr="preencoded.png"/>
-          <p:cNvPicPr>
-            <a:picLocks noChangeAspect="1"/>
-          </p:cNvPicPr>
-          <p:nvPr/>
-        </p:nvPicPr>
-        <p:blipFill>
-          <a:blip r:embed="rId4"/>
-          <a:stretch>
-            <a:fillRect/>
-          </a:stretch>
-        </p:blipFill>
-        <p:spPr>
-          <a:xfrm>
-            <a:off x="4987138" y="3889858"/>
-            <a:ext cx="541325" cy="541325"/>
-          </a:xfrm>
-          <a:prstGeom prst="rect">
-            <a:avLst/>
-          </a:prstGeom>
-        </p:spPr>
-      </p:pic>
-      <p:sp>
-        <p:nvSpPr>
-          <p:cNvPr id="13" name="Text 9"/>
-          <p:cNvSpPr/>
-          <p:nvPr/>
-        </p:nvSpPr>
-        <p:spPr>
-          <a:xfrm>
-            <a:off x="4206240" y="4544568"/>
-            <a:ext cx="2103120" cy="320040"/>
-          </a:xfrm>
-          <a:prstGeom prst="rect">
-            <a:avLst/>
-          </a:prstGeom>
-          <a:noFill/>
-          <a:ln/>
-        </p:spPr>
-        <p:txBody>
-          <a:bodyPr wrap="square" lIns="0" tIns="0" rIns="0" bIns="0" rtlCol="0" anchor="ctr"/>
-          <a:lstStyle/>
-          <a:p>
-            <a:pPr marL="0" indent="0" algn="ctr">
-              <a:buNone/>
-            </a:pPr>
-            <a:r>
-              <a:rPr lang="en-US" sz="1100" b="1" dirty="0">
-                <a:solidFill>
-                  <a:srgbClr val="E9F7EC"/>
-                </a:solidFill>
-                <a:latin typeface="Calibri" pitchFamily="34" charset="0"/>
-                <a:ea typeface="Calibri" pitchFamily="34" charset="-122"/>
-                <a:cs typeface="Calibri" pitchFamily="34" charset="-120"/>
-              </a:rPr>
-              <a:t>학생이 뚫는다</a:t>
-            </a:r>
-            <a:endParaRPr lang="en-US" sz="1100" dirty="0"/>
-          </a:p>
-        </p:txBody>
-      </p:sp>
-      <p:sp>
-        <p:nvSpPr>
-          <p:cNvPr id="14" name="Shape 10"/>
-          <p:cNvSpPr/>
-          <p:nvPr/>
-        </p:nvSpPr>
-        <p:spPr>
-          <a:xfrm>
-            <a:off x="3383280" y="5303520"/>
-            <a:ext cx="731520" cy="731520"/>
-          </a:xfrm>
-          <a:prstGeom prst="ellipse">
-            <a:avLst/>
-          </a:prstGeom>
-          <a:solidFill>
-            <a:srgbClr val="0E4419"/>
-          </a:solidFill>
-          <a:ln w="12700">
-            <a:solidFill>
-              <a:srgbClr val="17431F"/>
-            </a:solidFill>
-            <a:prstDash val="solid"/>
-          </a:ln>
-        </p:spPr>
-      </p:sp>
-      <p:pic>
-        <p:nvPicPr>
-          <p:cNvPr id="15" name="Image 2" descr="preencoded.png"/>
-          <p:cNvPicPr>
-            <a:picLocks noChangeAspect="1"/>
-          </p:cNvPicPr>
-          <p:nvPr/>
-        </p:nvPicPr>
-        <p:blipFill>
-          <a:blip r:embed="rId5"/>
-          <a:stretch>
-            <a:fillRect/>
-          </a:stretch>
-        </p:blipFill>
-        <p:spPr>
-          <a:xfrm>
-            <a:off x="3478378" y="5398618"/>
-            <a:ext cx="541325" cy="541325"/>
-          </a:xfrm>
-          <a:prstGeom prst="rect">
-            <a:avLst/>
-          </a:prstGeom>
-        </p:spPr>
-      </p:pic>
-      <p:sp>
-        <p:nvSpPr>
-          <p:cNvPr id="16" name="Text 11"/>
-          <p:cNvSpPr/>
-          <p:nvPr/>
-        </p:nvSpPr>
-        <p:spPr>
-          <a:xfrm>
-            <a:off x="2697480" y="6053328"/>
-            <a:ext cx="2103120" cy="320040"/>
-          </a:xfrm>
-          <a:prstGeom prst="rect">
-            <a:avLst/>
-          </a:prstGeom>
-          <a:noFill/>
-          <a:ln/>
-        </p:spPr>
-        <p:txBody>
-          <a:bodyPr wrap="square" lIns="0" tIns="0" rIns="0" bIns="0" rtlCol="0" anchor="ctr"/>
-          <a:lstStyle/>
-          <a:p>
-            <a:pPr marL="0" indent="0" algn="ctr">
-              <a:buNone/>
-            </a:pPr>
-            <a:r>
-              <a:rPr lang="en-US" sz="1100" b="1" dirty="0">
-                <a:solidFill>
-                  <a:srgbClr val="E9F7EC"/>
-                </a:solidFill>
-                <a:latin typeface="Calibri" pitchFamily="34" charset="0"/>
-                <a:ea typeface="Calibri" pitchFamily="34" charset="-122"/>
-                <a:cs typeface="Calibri" pitchFamily="34" charset="-120"/>
-              </a:rPr>
-              <a:t>성취감·의욕 ↑</a:t>
-            </a:r>
-            <a:endParaRPr lang="en-US" sz="1100" dirty="0"/>
-          </a:p>
-        </p:txBody>
-      </p:sp>
-      <p:sp>
-        <p:nvSpPr>
-          <p:cNvPr id="17" name="Shape 12"/>
-          <p:cNvSpPr/>
-          <p:nvPr/>
-        </p:nvSpPr>
-        <p:spPr>
-          <a:xfrm>
-            <a:off x="1874520" y="3794760"/>
-            <a:ext cx="731520" cy="731520"/>
-          </a:xfrm>
-          <a:prstGeom prst="ellipse">
-            <a:avLst/>
-          </a:prstGeom>
-          <a:solidFill>
-            <a:srgbClr val="0E4419"/>
-          </a:solidFill>
-          <a:ln w="12700">
-            <a:solidFill>
-              <a:srgbClr val="17431F"/>
-            </a:solidFill>
-            <a:prstDash val="solid"/>
-          </a:ln>
-        </p:spPr>
-      </p:sp>
-      <p:pic>
-        <p:nvPicPr>
-          <p:cNvPr id="18" name="Image 3" descr="preencoded.png"/>
-          <p:cNvPicPr>
-            <a:picLocks noChangeAspect="1"/>
-          </p:cNvPicPr>
-          <p:nvPr/>
-        </p:nvPicPr>
-        <p:blipFill>
-          <a:blip r:embed="rId6"/>
-          <a:stretch>
-            <a:fillRect/>
-          </a:stretch>
-        </p:blipFill>
-        <p:spPr>
-          <a:xfrm>
-            <a:off x="1969618" y="3889858"/>
-            <a:ext cx="541325" cy="541325"/>
-          </a:xfrm>
-          <a:prstGeom prst="rect">
-            <a:avLst/>
-          </a:prstGeom>
-        </p:spPr>
-      </p:pic>
-      <p:sp>
-        <p:nvSpPr>
-          <p:cNvPr id="19" name="Text 13"/>
-          <p:cNvSpPr/>
-          <p:nvPr/>
-        </p:nvSpPr>
-        <p:spPr>
-          <a:xfrm>
-            <a:off x="1188720" y="4544568"/>
-            <a:ext cx="2103120" cy="320040"/>
-          </a:xfrm>
-          <a:prstGeom prst="rect">
-            <a:avLst/>
-          </a:prstGeom>
-          <a:noFill/>
-          <a:ln/>
-        </p:spPr>
-        <p:txBody>
-          <a:bodyPr wrap="square" lIns="0" tIns="0" rIns="0" bIns="0" rtlCol="0" anchor="ctr"/>
-          <a:lstStyle/>
-          <a:p>
-            <a:pPr marL="0" indent="0" algn="ctr">
-              <a:buNone/>
-            </a:pPr>
-            <a:r>
-              <a:rPr lang="en-US" sz="1100" b="1" dirty="0">
-                <a:solidFill>
-                  <a:srgbClr val="E9F7EC"/>
-                </a:solidFill>
-                <a:latin typeface="Calibri" pitchFamily="34" charset="0"/>
-                <a:ea typeface="Calibri" pitchFamily="34" charset="-122"/>
-                <a:cs typeface="Calibri" pitchFamily="34" charset="-120"/>
-              </a:rPr>
-              <a:t>다른 방법 탐색</a:t>
-            </a:r>
-            <a:endParaRPr lang="en-US" sz="1100" dirty="0"/>
-          </a:p>
-        </p:txBody>
-      </p:sp>
-      <p:sp>
-        <p:nvSpPr>
-          <p:cNvPr id="20" name="Shape 14"/>
-          <p:cNvSpPr/>
-          <p:nvPr/>
-        </p:nvSpPr>
-        <p:spPr>
-          <a:xfrm>
-            <a:off x="6949440" y="2148840"/>
-            <a:ext cx="4602175" cy="3566160"/>
-          </a:xfrm>
-          <a:prstGeom prst="roundRect">
-            <a:avLst>
-              <a:gd name="adj" fmla="val 2051"/>
-            </a:avLst>
-          </a:prstGeom>
-          <a:solidFill>
-            <a:srgbClr val="0B1510"/>
-          </a:solidFill>
-          <a:ln w="9525">
-            <a:solidFill>
-              <a:srgbClr val="17431F"/>
-            </a:solidFill>
-            <a:prstDash val="solid"/>
-          </a:ln>
-          <a:effectLst>
-            <a:outerShdw blurRad="101600" dist="38100" dir="5400000" algn="bl" rotWithShape="0">
-              <a:srgbClr val="000000">
-                <a:alpha val="50000"/>
-              </a:srgbClr>
-            </a:outerShdw>
-          </a:effectLst>
-        </p:spPr>
-      </p:sp>
-      <p:sp>
-        <p:nvSpPr>
-          <p:cNvPr id="21" name="Text 15"/>
-          <p:cNvSpPr/>
-          <p:nvPr/>
-        </p:nvSpPr>
-        <p:spPr>
-          <a:xfrm>
-            <a:off x="7269480" y="2377440"/>
-            <a:ext cx="3962095" cy="502920"/>
-          </a:xfrm>
-          <a:prstGeom prst="rect">
-            <a:avLst/>
-          </a:prstGeom>
-          <a:noFill/>
-          <a:ln/>
-        </p:spPr>
-        <p:txBody>
-          <a:bodyPr wrap="square" lIns="0" tIns="0" rIns="0" bIns="0" rtlCol="0" anchor="ctr"/>
-          <a:lstStyle/>
-          <a:p>
-            <a:pPr marL="0" indent="0">
-              <a:buNone/>
-            </a:pPr>
-            <a:r>
-              <a:rPr lang="en-US" sz="1200" dirty="0">
-                <a:solidFill>
-                  <a:srgbClr val="E9F7EC"/>
-                </a:solidFill>
-                <a:latin typeface="Courier New" pitchFamily="34" charset="0"/>
-                <a:ea typeface="Courier New" pitchFamily="34" charset="-122"/>
-                <a:cs typeface="Courier New" pitchFamily="34" charset="-120"/>
-              </a:rPr>
-              <a:t>선생님: 어쭈, 이걸 이렇게 하네? 막아야지.</a:t>
-            </a:r>
-            <a:endParaRPr lang="en-US" sz="1200" dirty="0"/>
-          </a:p>
-        </p:txBody>
-      </p:sp>
-      <p:sp>
-        <p:nvSpPr>
-          <p:cNvPr id="22" name="Text 16"/>
-          <p:cNvSpPr/>
-          <p:nvPr/>
-        </p:nvSpPr>
-        <p:spPr>
-          <a:xfrm>
-            <a:off x="7269480" y="2944368"/>
-            <a:ext cx="3962095" cy="502920"/>
-          </a:xfrm>
-          <a:prstGeom prst="rect">
-            <a:avLst/>
-          </a:prstGeom>
-          <a:noFill/>
-          <a:ln/>
-        </p:spPr>
-        <p:txBody>
-          <a:bodyPr wrap="square" lIns="0" tIns="0" rIns="0" bIns="0" rtlCol="0" anchor="ctr"/>
-          <a:lstStyle/>
-          <a:p>
-            <a:pPr marL="0" indent="0">
-              <a:buNone/>
-            </a:pPr>
-            <a:r>
-              <a:rPr lang="en-US" sz="1200" dirty="0">
-                <a:solidFill>
-                  <a:srgbClr val="17C93B"/>
-                </a:solidFill>
-                <a:latin typeface="Courier New" pitchFamily="34" charset="0"/>
-                <a:ea typeface="Courier New" pitchFamily="34" charset="-122"/>
-                <a:cs typeface="Courier New" pitchFamily="34" charset="-120"/>
-              </a:rPr>
-              <a:t>학생: 어? 이걸 막네? 응, 다른 방법.</a:t>
-            </a:r>
-            <a:endParaRPr lang="en-US" sz="1200" dirty="0"/>
-          </a:p>
-        </p:txBody>
-      </p:sp>
-      <p:sp>
-        <p:nvSpPr>
-          <p:cNvPr id="23" name="Text 17"/>
-          <p:cNvSpPr/>
-          <p:nvPr/>
-        </p:nvSpPr>
-        <p:spPr>
-          <a:xfrm>
-            <a:off x="7269480" y="3511296"/>
-            <a:ext cx="3962095" cy="502920"/>
-          </a:xfrm>
-          <a:prstGeom prst="rect">
-            <a:avLst/>
-          </a:prstGeom>
-          <a:noFill/>
-          <a:ln/>
-        </p:spPr>
-        <p:txBody>
-          <a:bodyPr wrap="square" lIns="0" tIns="0" rIns="0" bIns="0" rtlCol="0" anchor="ctr"/>
-          <a:lstStyle/>
-          <a:p>
-            <a:pPr marL="0" indent="0">
-              <a:buNone/>
-            </a:pPr>
-            <a:r>
-              <a:rPr lang="en-US" sz="1200" dirty="0">
-                <a:solidFill>
-                  <a:srgbClr val="E9F7EC"/>
-                </a:solidFill>
-                <a:latin typeface="Courier New" pitchFamily="34" charset="0"/>
-                <a:ea typeface="Courier New" pitchFamily="34" charset="-122"/>
-                <a:cs typeface="Courier New" pitchFamily="34" charset="-120"/>
-              </a:rPr>
-              <a:t>선생님: 아 또 뚫었네, 그럼 또 막아.</a:t>
-            </a:r>
-            <a:endParaRPr lang="en-US" sz="1200" dirty="0"/>
-          </a:p>
-        </p:txBody>
-      </p:sp>
-      <p:sp>
-        <p:nvSpPr>
-          <p:cNvPr id="24" name="Text 18"/>
-          <p:cNvSpPr/>
-          <p:nvPr/>
-        </p:nvSpPr>
-        <p:spPr>
-          <a:xfrm>
-            <a:off x="7269480" y="4078224"/>
-            <a:ext cx="3962095" cy="502920"/>
-          </a:xfrm>
-          <a:prstGeom prst="rect">
-            <a:avLst/>
-          </a:prstGeom>
-          <a:noFill/>
-          <a:ln/>
-        </p:spPr>
-        <p:txBody>
-          <a:bodyPr wrap="square" lIns="0" tIns="0" rIns="0" bIns="0" rtlCol="0" anchor="ctr"/>
-          <a:lstStyle/>
-          <a:p>
-            <a:pPr marL="0" indent="0">
-              <a:buNone/>
-            </a:pPr>
-            <a:r>
-              <a:rPr lang="en-US" sz="1200" dirty="0">
-                <a:solidFill>
-                  <a:srgbClr val="17C93B"/>
-                </a:solidFill>
-                <a:latin typeface="Courier New" pitchFamily="34" charset="0"/>
-                <a:ea typeface="Courier New" pitchFamily="34" charset="-122"/>
-                <a:cs typeface="Courier New" pitchFamily="34" charset="-120"/>
-              </a:rPr>
-              <a:t>학생: 어? 이걸 막아? 응, 다른 방법.</a:t>
-            </a:r>
-            <a:endParaRPr lang="en-US" sz="1200" dirty="0"/>
-          </a:p>
-        </p:txBody>
-      </p:sp>
-      <p:sp>
-        <p:nvSpPr>
-          <p:cNvPr id="25" name="Text 19"/>
-          <p:cNvSpPr/>
-          <p:nvPr/>
-        </p:nvSpPr>
-        <p:spPr>
-          <a:xfrm>
-            <a:off x="7269480" y="4782312"/>
-            <a:ext cx="3962095" cy="822960"/>
-          </a:xfrm>
-          <a:prstGeom prst="rect">
-            <a:avLst/>
-          </a:prstGeom>
-          <a:noFill/>
-          <a:ln/>
-        </p:spPr>
-        <p:txBody>
-          <a:bodyPr wrap="square" lIns="0" tIns="0" rIns="0" bIns="0" rtlCol="0" anchor="ctr"/>
-          <a:lstStyle/>
-          <a:p>
-            <a:pPr marL="0" indent="0">
-              <a:lnSpc>
-                <a:spcPct val="135000"/>
-              </a:lnSpc>
-              <a:buNone/>
-            </a:pPr>
-            <a:r>
-              <a:rPr lang="en-US" sz="1250" i="1" dirty="0">
-                <a:solidFill>
-                  <a:srgbClr val="6E9679"/>
-                </a:solidFill>
-                <a:latin typeface="Calibri" pitchFamily="34" charset="0"/>
-                <a:ea typeface="Calibri" pitchFamily="34" charset="-122"/>
-                <a:cs typeface="Calibri" pitchFamily="34" charset="-120"/>
-              </a:rPr>
-              <a:t>실패해도 포기하지 않고, 스스로 해결책을 탐색했다.</a:t>
-            </a:r>
-            <a:endParaRPr lang="en-US" sz="1250" dirty="0"/>
-          </a:p>
-        </p:txBody>
-      </p:sp>
-      <p:sp>
-        <p:nvSpPr>
-          <p:cNvPr id="26" name="Text 20"/>
-          <p:cNvSpPr/>
-          <p:nvPr/>
-        </p:nvSpPr>
-        <p:spPr>
-          <a:xfrm>
-            <a:off x="11002975" y="6446520"/>
-            <a:ext cx="914400" cy="274320"/>
-          </a:xfrm>
-          <a:prstGeom prst="rect">
-            <a:avLst/>
-          </a:prstGeom>
-          <a:noFill/>
-          <a:ln/>
-        </p:spPr>
-        <p:txBody>
-          <a:bodyPr wrap="square" lIns="0" tIns="0" rIns="0" bIns="0" rtlCol="0" anchor="ctr"/>
-          <a:lstStyle/>
-          <a:p>
-            <a:pPr marL="0" indent="0" algn="r">
-              <a:buNone/>
-            </a:pPr>
-            <a:r>
-              <a:rPr lang="en-US" sz="900" dirty="0">
-                <a:solidFill>
-                  <a:srgbClr val="6E9679"/>
-                </a:solidFill>
-                <a:latin typeface="Courier New" pitchFamily="34" charset="0"/>
-                <a:ea typeface="Courier New" pitchFamily="34" charset="-122"/>
-                <a:cs typeface="Courier New" pitchFamily="34" charset="-120"/>
-              </a:rPr>
-              <a:t>18 / 20</a:t>
             </a:r>
             <a:endParaRPr lang="en-US" sz="900" dirty="0"/>
           </a:p>
@@ -9164,6 +9396,839 @@
 
 <file path=ppt/slides/slide20.xml><?xml version="1.0" encoding="utf-8"?>
 <p:sld xmlns:a="http://schemas.openxmlformats.org/drawingml/2006/main" xmlns:r="http://schemas.openxmlformats.org/officeDocument/2006/relationships" xmlns:p="http://schemas.openxmlformats.org/presentationml/2006/main">
+  <p:cSld name="Slide 18">
+    <p:bg>
+      <p:bgPr>
+        <a:solidFill>
+          <a:srgbClr val="070D08"/>
+        </a:solidFill>
+        <a:effectLst/>
+      </p:bgPr>
+    </p:bg>
+    <p:spTree>
+      <p:nvGrpSpPr>
+        <p:cNvPr id="1" name=""/>
+        <p:cNvGrpSpPr/>
+        <p:nvPr/>
+      </p:nvGrpSpPr>
+      <p:grpSpPr>
+        <a:xfrm>
+          <a:off x="0" y="0"/>
+          <a:ext cx="0" cy="0"/>
+          <a:chOff x="0" y="0"/>
+          <a:chExt cx="0" cy="0"/>
+        </a:xfrm>
+      </p:grpSpPr>
+      <p:sp>
+        <p:nvSpPr>
+          <p:cNvPr id="2" name="Text 0"/>
+          <p:cNvSpPr/>
+          <p:nvPr/>
+        </p:nvSpPr>
+        <p:spPr>
+          <a:xfrm>
+            <a:off x="640080" y="457200"/>
+            <a:ext cx="7315200" cy="320040"/>
+          </a:xfrm>
+          <a:prstGeom prst="rect">
+            <a:avLst/>
+          </a:prstGeom>
+          <a:noFill/>
+          <a:ln/>
+        </p:spPr>
+        <p:txBody>
+          <a:bodyPr wrap="square" lIns="0" tIns="0" rIns="0" bIns="0" rtlCol="0" anchor="ctr"/>
+          <a:lstStyle/>
+          <a:p>
+            <a:pPr marL="0" indent="0">
+              <a:buNone/>
+            </a:pPr>
+            <a:r>
+              <a:rPr lang="en-US" sz="1200" b="1" kern="0" spc="300" dirty="0">
+                <a:solidFill>
+                  <a:srgbClr val="17C93B"/>
+                </a:solidFill>
+                <a:latin typeface="Courier New" pitchFamily="34" charset="0"/>
+                <a:ea typeface="Courier New" pitchFamily="34" charset="-122"/>
+                <a:cs typeface="Courier New" pitchFamily="34" charset="-120"/>
+              </a:rPr>
+              <a:t>교육적 의미</a:t>
+            </a:r>
+            <a:endParaRPr lang="en-US" sz="1200" dirty="0"/>
+          </a:p>
+        </p:txBody>
+      </p:sp>
+      <p:sp>
+        <p:nvSpPr>
+          <p:cNvPr id="3" name="Text 1"/>
+          <p:cNvSpPr/>
+          <p:nvPr/>
+        </p:nvSpPr>
+        <p:spPr>
+          <a:xfrm>
+            <a:off x="640080" y="749808"/>
+            <a:ext cx="10881360" cy="822960"/>
+          </a:xfrm>
+          <a:prstGeom prst="rect">
+            <a:avLst/>
+          </a:prstGeom>
+          <a:noFill/>
+          <a:ln/>
+        </p:spPr>
+        <p:txBody>
+          <a:bodyPr wrap="square" lIns="0" tIns="0" rIns="0" bIns="0" rtlCol="0" anchor="ctr"/>
+          <a:lstStyle/>
+          <a:p>
+            <a:pPr marL="0" indent="0">
+              <a:lnSpc>
+                <a:spcPct val="105000"/>
+              </a:lnSpc>
+              <a:buNone/>
+            </a:pPr>
+            <a:r>
+              <a:rPr lang="en-US" sz="3000" b="1" dirty="0">
+                <a:solidFill>
+                  <a:srgbClr val="FFFFFF"/>
+                </a:solidFill>
+                <a:latin typeface="Cambria" pitchFamily="34" charset="0"/>
+                <a:ea typeface="Cambria" pitchFamily="34" charset="-122"/>
+                <a:cs typeface="Cambria" pitchFamily="34" charset="-120"/>
+              </a:rPr>
+              <a:t>공방전이 만든 자기효능감</a:t>
+            </a:r>
+            <a:endParaRPr lang="en-US" sz="3000" dirty="0"/>
+          </a:p>
+        </p:txBody>
+      </p:sp>
+      <p:sp>
+        <p:nvSpPr>
+          <p:cNvPr id="4" name="Shape 2"/>
+          <p:cNvSpPr/>
+          <p:nvPr/>
+        </p:nvSpPr>
+        <p:spPr>
+          <a:xfrm>
+            <a:off x="3749040" y="2651760"/>
+            <a:ext cx="1508760" cy="1508760"/>
+          </a:xfrm>
+          <a:prstGeom prst="line">
+            <a:avLst/>
+          </a:prstGeom>
+          <a:noFill/>
+          <a:ln w="15875">
+            <a:solidFill>
+              <a:srgbClr val="17C93B"/>
+            </a:solidFill>
+            <a:prstDash val="solid"/>
+            <a:tailEnd type="triangle"/>
+          </a:ln>
+        </p:spPr>
+      </p:sp>
+      <p:sp>
+        <p:nvSpPr>
+          <p:cNvPr id="5" name="Shape 3"/>
+          <p:cNvSpPr/>
+          <p:nvPr/>
+        </p:nvSpPr>
+        <p:spPr>
+          <a:xfrm flipH="1">
+            <a:off x="3749040" y="4160520"/>
+            <a:ext cx="1508760" cy="1508760"/>
+          </a:xfrm>
+          <a:prstGeom prst="line">
+            <a:avLst/>
+          </a:prstGeom>
+          <a:noFill/>
+          <a:ln w="15875">
+            <a:solidFill>
+              <a:srgbClr val="17C93B"/>
+            </a:solidFill>
+            <a:prstDash val="solid"/>
+            <a:tailEnd type="triangle"/>
+          </a:ln>
+        </p:spPr>
+      </p:sp>
+      <p:sp>
+        <p:nvSpPr>
+          <p:cNvPr id="6" name="Shape 4"/>
+          <p:cNvSpPr/>
+          <p:nvPr/>
+        </p:nvSpPr>
+        <p:spPr>
+          <a:xfrm flipH="1" flipV="1">
+            <a:off x="2240280" y="4160520"/>
+            <a:ext cx="1508760" cy="1508760"/>
+          </a:xfrm>
+          <a:prstGeom prst="line">
+            <a:avLst/>
+          </a:prstGeom>
+          <a:noFill/>
+          <a:ln w="15875">
+            <a:solidFill>
+              <a:srgbClr val="17C93B"/>
+            </a:solidFill>
+            <a:prstDash val="solid"/>
+            <a:tailEnd type="triangle"/>
+          </a:ln>
+        </p:spPr>
+      </p:sp>
+      <p:sp>
+        <p:nvSpPr>
+          <p:cNvPr id="7" name="Shape 5"/>
+          <p:cNvSpPr/>
+          <p:nvPr/>
+        </p:nvSpPr>
+        <p:spPr>
+          <a:xfrm flipV="1">
+            <a:off x="2240280" y="2651760"/>
+            <a:ext cx="1508760" cy="1508760"/>
+          </a:xfrm>
+          <a:prstGeom prst="line">
+            <a:avLst/>
+          </a:prstGeom>
+          <a:noFill/>
+          <a:ln w="15875">
+            <a:solidFill>
+              <a:srgbClr val="17C93B"/>
+            </a:solidFill>
+            <a:prstDash val="solid"/>
+            <a:tailEnd type="triangle"/>
+          </a:ln>
+        </p:spPr>
+      </p:sp>
+      <p:sp>
+        <p:nvSpPr>
+          <p:cNvPr id="8" name="Shape 6"/>
+          <p:cNvSpPr/>
+          <p:nvPr/>
+        </p:nvSpPr>
+        <p:spPr>
+          <a:xfrm>
+            <a:off x="3383280" y="2286000"/>
+            <a:ext cx="731520" cy="731520"/>
+          </a:xfrm>
+          <a:prstGeom prst="ellipse">
+            <a:avLst/>
+          </a:prstGeom>
+          <a:solidFill>
+            <a:srgbClr val="0E4419"/>
+          </a:solidFill>
+          <a:ln w="12700">
+            <a:solidFill>
+              <a:srgbClr val="17431F"/>
+            </a:solidFill>
+            <a:prstDash val="solid"/>
+          </a:ln>
+        </p:spPr>
+      </p:sp>
+      <p:pic>
+        <p:nvPicPr>
+          <p:cNvPr id="9" name="Image 0" descr="preencoded.png"/>
+          <p:cNvPicPr>
+            <a:picLocks noChangeAspect="1"/>
+          </p:cNvPicPr>
+          <p:nvPr/>
+        </p:nvPicPr>
+        <p:blipFill>
+          <a:blip r:embed="rId3"/>
+          <a:stretch>
+            <a:fillRect/>
+          </a:stretch>
+        </p:blipFill>
+        <p:spPr>
+          <a:xfrm>
+            <a:off x="3478378" y="2381098"/>
+            <a:ext cx="541325" cy="541325"/>
+          </a:xfrm>
+          <a:prstGeom prst="rect">
+            <a:avLst/>
+          </a:prstGeom>
+        </p:spPr>
+      </p:pic>
+      <p:sp>
+        <p:nvSpPr>
+          <p:cNvPr id="10" name="Text 7"/>
+          <p:cNvSpPr/>
+          <p:nvPr/>
+        </p:nvSpPr>
+        <p:spPr>
+          <a:xfrm>
+            <a:off x="2697480" y="3035808"/>
+            <a:ext cx="2103120" cy="320040"/>
+          </a:xfrm>
+          <a:prstGeom prst="rect">
+            <a:avLst/>
+          </a:prstGeom>
+          <a:noFill/>
+          <a:ln/>
+        </p:spPr>
+        <p:txBody>
+          <a:bodyPr wrap="square" lIns="0" tIns="0" rIns="0" bIns="0" rtlCol="0" anchor="ctr"/>
+          <a:lstStyle/>
+          <a:p>
+            <a:pPr marL="0" indent="0" algn="ctr">
+              <a:buNone/>
+            </a:pPr>
+            <a:r>
+              <a:rPr lang="en-US" sz="1100" b="1" dirty="0">
+                <a:solidFill>
+                  <a:srgbClr val="E9F7EC"/>
+                </a:solidFill>
+                <a:latin typeface="Calibri" pitchFamily="34" charset="0"/>
+                <a:ea typeface="Calibri" pitchFamily="34" charset="-122"/>
+                <a:cs typeface="Calibri" pitchFamily="34" charset="-120"/>
+              </a:rPr>
+              <a:t>선생님이 막는다</a:t>
+            </a:r>
+            <a:endParaRPr lang="en-US" sz="1100" dirty="0"/>
+          </a:p>
+        </p:txBody>
+      </p:sp>
+      <p:sp>
+        <p:nvSpPr>
+          <p:cNvPr id="11" name="Shape 8"/>
+          <p:cNvSpPr/>
+          <p:nvPr/>
+        </p:nvSpPr>
+        <p:spPr>
+          <a:xfrm>
+            <a:off x="4892040" y="3794760"/>
+            <a:ext cx="731520" cy="731520"/>
+          </a:xfrm>
+          <a:prstGeom prst="ellipse">
+            <a:avLst/>
+          </a:prstGeom>
+          <a:solidFill>
+            <a:srgbClr val="0E4419"/>
+          </a:solidFill>
+          <a:ln w="12700">
+            <a:solidFill>
+              <a:srgbClr val="17431F"/>
+            </a:solidFill>
+            <a:prstDash val="solid"/>
+          </a:ln>
+        </p:spPr>
+      </p:sp>
+      <p:pic>
+        <p:nvPicPr>
+          <p:cNvPr id="12" name="Image 1" descr="preencoded.png"/>
+          <p:cNvPicPr>
+            <a:picLocks noChangeAspect="1"/>
+          </p:cNvPicPr>
+          <p:nvPr/>
+        </p:nvPicPr>
+        <p:blipFill>
+          <a:blip r:embed="rId4"/>
+          <a:stretch>
+            <a:fillRect/>
+          </a:stretch>
+        </p:blipFill>
+        <p:spPr>
+          <a:xfrm>
+            <a:off x="4987138" y="3889858"/>
+            <a:ext cx="541325" cy="541325"/>
+          </a:xfrm>
+          <a:prstGeom prst="rect">
+            <a:avLst/>
+          </a:prstGeom>
+        </p:spPr>
+      </p:pic>
+      <p:sp>
+        <p:nvSpPr>
+          <p:cNvPr id="13" name="Text 9"/>
+          <p:cNvSpPr/>
+          <p:nvPr/>
+        </p:nvSpPr>
+        <p:spPr>
+          <a:xfrm>
+            <a:off x="4206240" y="4544568"/>
+            <a:ext cx="2103120" cy="320040"/>
+          </a:xfrm>
+          <a:prstGeom prst="rect">
+            <a:avLst/>
+          </a:prstGeom>
+          <a:noFill/>
+          <a:ln/>
+        </p:spPr>
+        <p:txBody>
+          <a:bodyPr wrap="square" lIns="0" tIns="0" rIns="0" bIns="0" rtlCol="0" anchor="ctr"/>
+          <a:lstStyle/>
+          <a:p>
+            <a:pPr marL="0" indent="0" algn="ctr">
+              <a:buNone/>
+            </a:pPr>
+            <a:r>
+              <a:rPr lang="en-US" sz="1100" b="1" dirty="0">
+                <a:solidFill>
+                  <a:srgbClr val="E9F7EC"/>
+                </a:solidFill>
+                <a:latin typeface="Calibri" pitchFamily="34" charset="0"/>
+                <a:ea typeface="Calibri" pitchFamily="34" charset="-122"/>
+                <a:cs typeface="Calibri" pitchFamily="34" charset="-120"/>
+              </a:rPr>
+              <a:t>학생이 뚫는다</a:t>
+            </a:r>
+            <a:endParaRPr lang="en-US" sz="1100" dirty="0"/>
+          </a:p>
+        </p:txBody>
+      </p:sp>
+      <p:sp>
+        <p:nvSpPr>
+          <p:cNvPr id="14" name="Shape 10"/>
+          <p:cNvSpPr/>
+          <p:nvPr/>
+        </p:nvSpPr>
+        <p:spPr>
+          <a:xfrm>
+            <a:off x="3383280" y="5303520"/>
+            <a:ext cx="731520" cy="731520"/>
+          </a:xfrm>
+          <a:prstGeom prst="ellipse">
+            <a:avLst/>
+          </a:prstGeom>
+          <a:solidFill>
+            <a:srgbClr val="0E4419"/>
+          </a:solidFill>
+          <a:ln w="12700">
+            <a:solidFill>
+              <a:srgbClr val="17431F"/>
+            </a:solidFill>
+            <a:prstDash val="solid"/>
+          </a:ln>
+        </p:spPr>
+      </p:sp>
+      <p:pic>
+        <p:nvPicPr>
+          <p:cNvPr id="15" name="Image 2" descr="preencoded.png"/>
+          <p:cNvPicPr>
+            <a:picLocks noChangeAspect="1"/>
+          </p:cNvPicPr>
+          <p:nvPr/>
+        </p:nvPicPr>
+        <p:blipFill>
+          <a:blip r:embed="rId5"/>
+          <a:stretch>
+            <a:fillRect/>
+          </a:stretch>
+        </p:blipFill>
+        <p:spPr>
+          <a:xfrm>
+            <a:off x="3478378" y="5398618"/>
+            <a:ext cx="541325" cy="541325"/>
+          </a:xfrm>
+          <a:prstGeom prst="rect">
+            <a:avLst/>
+          </a:prstGeom>
+        </p:spPr>
+      </p:pic>
+      <p:sp>
+        <p:nvSpPr>
+          <p:cNvPr id="16" name="Text 11"/>
+          <p:cNvSpPr/>
+          <p:nvPr/>
+        </p:nvSpPr>
+        <p:spPr>
+          <a:xfrm>
+            <a:off x="2697480" y="6053328"/>
+            <a:ext cx="2103120" cy="320040"/>
+          </a:xfrm>
+          <a:prstGeom prst="rect">
+            <a:avLst/>
+          </a:prstGeom>
+          <a:noFill/>
+          <a:ln/>
+        </p:spPr>
+        <p:txBody>
+          <a:bodyPr wrap="square" lIns="0" tIns="0" rIns="0" bIns="0" rtlCol="0" anchor="ctr"/>
+          <a:lstStyle/>
+          <a:p>
+            <a:pPr marL="0" indent="0" algn="ctr">
+              <a:buNone/>
+            </a:pPr>
+            <a:r>
+              <a:rPr lang="en-US" sz="1100" b="1" dirty="0">
+                <a:solidFill>
+                  <a:srgbClr val="E9F7EC"/>
+                </a:solidFill>
+                <a:latin typeface="Calibri" pitchFamily="34" charset="0"/>
+                <a:ea typeface="Calibri" pitchFamily="34" charset="-122"/>
+                <a:cs typeface="Calibri" pitchFamily="34" charset="-120"/>
+              </a:rPr>
+              <a:t>성취감·의욕 ↑</a:t>
+            </a:r>
+            <a:endParaRPr lang="en-US" sz="1100" dirty="0"/>
+          </a:p>
+        </p:txBody>
+      </p:sp>
+      <p:sp>
+        <p:nvSpPr>
+          <p:cNvPr id="17" name="Shape 12"/>
+          <p:cNvSpPr/>
+          <p:nvPr/>
+        </p:nvSpPr>
+        <p:spPr>
+          <a:xfrm>
+            <a:off x="1874520" y="3794760"/>
+            <a:ext cx="731520" cy="731520"/>
+          </a:xfrm>
+          <a:prstGeom prst="ellipse">
+            <a:avLst/>
+          </a:prstGeom>
+          <a:solidFill>
+            <a:srgbClr val="0E4419"/>
+          </a:solidFill>
+          <a:ln w="12700">
+            <a:solidFill>
+              <a:srgbClr val="17431F"/>
+            </a:solidFill>
+            <a:prstDash val="solid"/>
+          </a:ln>
+        </p:spPr>
+      </p:sp>
+      <p:pic>
+        <p:nvPicPr>
+          <p:cNvPr id="18" name="Image 3" descr="preencoded.png"/>
+          <p:cNvPicPr>
+            <a:picLocks noChangeAspect="1"/>
+          </p:cNvPicPr>
+          <p:nvPr/>
+        </p:nvPicPr>
+        <p:blipFill>
+          <a:blip r:embed="rId6"/>
+          <a:stretch>
+            <a:fillRect/>
+          </a:stretch>
+        </p:blipFill>
+        <p:spPr>
+          <a:xfrm>
+            <a:off x="1969618" y="3889858"/>
+            <a:ext cx="541325" cy="541325"/>
+          </a:xfrm>
+          <a:prstGeom prst="rect">
+            <a:avLst/>
+          </a:prstGeom>
+        </p:spPr>
+      </p:pic>
+      <p:sp>
+        <p:nvSpPr>
+          <p:cNvPr id="19" name="Text 13"/>
+          <p:cNvSpPr/>
+          <p:nvPr/>
+        </p:nvSpPr>
+        <p:spPr>
+          <a:xfrm>
+            <a:off x="1188720" y="4544568"/>
+            <a:ext cx="2103120" cy="320040"/>
+          </a:xfrm>
+          <a:prstGeom prst="rect">
+            <a:avLst/>
+          </a:prstGeom>
+          <a:noFill/>
+          <a:ln/>
+        </p:spPr>
+        <p:txBody>
+          <a:bodyPr wrap="square" lIns="0" tIns="0" rIns="0" bIns="0" rtlCol="0" anchor="ctr"/>
+          <a:lstStyle/>
+          <a:p>
+            <a:pPr marL="0" indent="0" algn="ctr">
+              <a:buNone/>
+            </a:pPr>
+            <a:r>
+              <a:rPr lang="en-US" sz="1100" b="1" dirty="0">
+                <a:solidFill>
+                  <a:srgbClr val="E9F7EC"/>
+                </a:solidFill>
+                <a:latin typeface="Calibri" pitchFamily="34" charset="0"/>
+                <a:ea typeface="Calibri" pitchFamily="34" charset="-122"/>
+                <a:cs typeface="Calibri" pitchFamily="34" charset="-120"/>
+              </a:rPr>
+              <a:t>다른 방법 탐색</a:t>
+            </a:r>
+            <a:endParaRPr lang="en-US" sz="1100" dirty="0"/>
+          </a:p>
+        </p:txBody>
+      </p:sp>
+      <p:sp>
+        <p:nvSpPr>
+          <p:cNvPr id="20" name="Shape 14"/>
+          <p:cNvSpPr/>
+          <p:nvPr/>
+        </p:nvSpPr>
+        <p:spPr>
+          <a:xfrm>
+            <a:off x="6949440" y="2148840"/>
+            <a:ext cx="4602175" cy="3566160"/>
+          </a:xfrm>
+          <a:prstGeom prst="roundRect">
+            <a:avLst>
+              <a:gd name="adj" fmla="val 2051"/>
+            </a:avLst>
+          </a:prstGeom>
+          <a:solidFill>
+            <a:srgbClr val="0B1510"/>
+          </a:solidFill>
+          <a:ln w="9525">
+            <a:solidFill>
+              <a:srgbClr val="17431F"/>
+            </a:solidFill>
+            <a:prstDash val="solid"/>
+          </a:ln>
+          <a:effectLst>
+            <a:outerShdw blurRad="101600" dist="38100" dir="5400000" algn="bl" rotWithShape="0">
+              <a:srgbClr val="000000">
+                <a:alpha val="50000"/>
+              </a:srgbClr>
+            </a:outerShdw>
+          </a:effectLst>
+        </p:spPr>
+      </p:sp>
+      <p:sp>
+        <p:nvSpPr>
+          <p:cNvPr id="21" name="Text 15"/>
+          <p:cNvSpPr/>
+          <p:nvPr/>
+        </p:nvSpPr>
+        <p:spPr>
+          <a:xfrm>
+            <a:off x="7269480" y="2377440"/>
+            <a:ext cx="3962095" cy="502920"/>
+          </a:xfrm>
+          <a:prstGeom prst="rect">
+            <a:avLst/>
+          </a:prstGeom>
+          <a:noFill/>
+          <a:ln/>
+        </p:spPr>
+        <p:txBody>
+          <a:bodyPr wrap="square" lIns="0" tIns="0" rIns="0" bIns="0" rtlCol="0" anchor="ctr"/>
+          <a:lstStyle/>
+          <a:p>
+            <a:pPr marL="0" indent="0">
+              <a:buNone/>
+            </a:pPr>
+            <a:r>
+              <a:rPr lang="en-US" sz="1200" dirty="0">
+                <a:solidFill>
+                  <a:srgbClr val="E9F7EC"/>
+                </a:solidFill>
+                <a:latin typeface="Courier New" pitchFamily="34" charset="0"/>
+                <a:ea typeface="Courier New" pitchFamily="34" charset="-122"/>
+                <a:cs typeface="Courier New" pitchFamily="34" charset="-120"/>
+              </a:rPr>
+              <a:t>선생님: 어쭈, 이걸 이렇게 하네? 막아야지.</a:t>
+            </a:r>
+            <a:endParaRPr lang="en-US" sz="1200" dirty="0"/>
+          </a:p>
+        </p:txBody>
+      </p:sp>
+      <p:sp>
+        <p:nvSpPr>
+          <p:cNvPr id="22" name="Text 16"/>
+          <p:cNvSpPr/>
+          <p:nvPr/>
+        </p:nvSpPr>
+        <p:spPr>
+          <a:xfrm>
+            <a:off x="7269480" y="2944368"/>
+            <a:ext cx="3962095" cy="502920"/>
+          </a:xfrm>
+          <a:prstGeom prst="rect">
+            <a:avLst/>
+          </a:prstGeom>
+          <a:noFill/>
+          <a:ln/>
+        </p:spPr>
+        <p:txBody>
+          <a:bodyPr wrap="square" lIns="0" tIns="0" rIns="0" bIns="0" rtlCol="0" anchor="ctr"/>
+          <a:lstStyle/>
+          <a:p>
+            <a:pPr marL="0" indent="0">
+              <a:buNone/>
+            </a:pPr>
+            <a:r>
+              <a:rPr lang="en-US" sz="1200" dirty="0">
+                <a:solidFill>
+                  <a:srgbClr val="17C93B"/>
+                </a:solidFill>
+                <a:latin typeface="Courier New" pitchFamily="34" charset="0"/>
+                <a:ea typeface="Courier New" pitchFamily="34" charset="-122"/>
+                <a:cs typeface="Courier New" pitchFamily="34" charset="-120"/>
+              </a:rPr>
+              <a:t>학생: 어? 이걸 막네? 응, 다른 방법.</a:t>
+            </a:r>
+            <a:endParaRPr lang="en-US" sz="1200" dirty="0"/>
+          </a:p>
+        </p:txBody>
+      </p:sp>
+      <p:sp>
+        <p:nvSpPr>
+          <p:cNvPr id="23" name="Text 17"/>
+          <p:cNvSpPr/>
+          <p:nvPr/>
+        </p:nvSpPr>
+        <p:spPr>
+          <a:xfrm>
+            <a:off x="7269480" y="3511296"/>
+            <a:ext cx="3962095" cy="502920"/>
+          </a:xfrm>
+          <a:prstGeom prst="rect">
+            <a:avLst/>
+          </a:prstGeom>
+          <a:noFill/>
+          <a:ln/>
+        </p:spPr>
+        <p:txBody>
+          <a:bodyPr wrap="square" lIns="0" tIns="0" rIns="0" bIns="0" rtlCol="0" anchor="ctr"/>
+          <a:lstStyle/>
+          <a:p>
+            <a:pPr marL="0" indent="0">
+              <a:buNone/>
+            </a:pPr>
+            <a:r>
+              <a:rPr lang="en-US" sz="1200" dirty="0">
+                <a:solidFill>
+                  <a:srgbClr val="E9F7EC"/>
+                </a:solidFill>
+                <a:latin typeface="Courier New" pitchFamily="34" charset="0"/>
+                <a:ea typeface="Courier New" pitchFamily="34" charset="-122"/>
+                <a:cs typeface="Courier New" pitchFamily="34" charset="-120"/>
+              </a:rPr>
+              <a:t>선생님: 아 또 뚫었네, 그럼 또 막아.</a:t>
+            </a:r>
+            <a:endParaRPr lang="en-US" sz="1200" dirty="0"/>
+          </a:p>
+        </p:txBody>
+      </p:sp>
+      <p:sp>
+        <p:nvSpPr>
+          <p:cNvPr id="24" name="Text 18"/>
+          <p:cNvSpPr/>
+          <p:nvPr/>
+        </p:nvSpPr>
+        <p:spPr>
+          <a:xfrm>
+            <a:off x="7269480" y="4078224"/>
+            <a:ext cx="3962095" cy="502920"/>
+          </a:xfrm>
+          <a:prstGeom prst="rect">
+            <a:avLst/>
+          </a:prstGeom>
+          <a:noFill/>
+          <a:ln/>
+        </p:spPr>
+        <p:txBody>
+          <a:bodyPr wrap="square" lIns="0" tIns="0" rIns="0" bIns="0" rtlCol="0" anchor="ctr"/>
+          <a:lstStyle/>
+          <a:p>
+            <a:pPr marL="0" indent="0">
+              <a:buNone/>
+            </a:pPr>
+            <a:r>
+              <a:rPr lang="en-US" sz="1200" dirty="0">
+                <a:solidFill>
+                  <a:srgbClr val="17C93B"/>
+                </a:solidFill>
+                <a:latin typeface="Courier New" pitchFamily="34" charset="0"/>
+                <a:ea typeface="Courier New" pitchFamily="34" charset="-122"/>
+                <a:cs typeface="Courier New" pitchFamily="34" charset="-120"/>
+              </a:rPr>
+              <a:t>학생: 어? 이걸 막아? 응, 다른 방법.</a:t>
+            </a:r>
+            <a:endParaRPr lang="en-US" sz="1200" dirty="0"/>
+          </a:p>
+        </p:txBody>
+      </p:sp>
+      <p:sp>
+        <p:nvSpPr>
+          <p:cNvPr id="25" name="Text 19"/>
+          <p:cNvSpPr/>
+          <p:nvPr/>
+        </p:nvSpPr>
+        <p:spPr>
+          <a:xfrm>
+            <a:off x="7269480" y="4782312"/>
+            <a:ext cx="3962095" cy="822960"/>
+          </a:xfrm>
+          <a:prstGeom prst="rect">
+            <a:avLst/>
+          </a:prstGeom>
+          <a:noFill/>
+          <a:ln/>
+        </p:spPr>
+        <p:txBody>
+          <a:bodyPr wrap="square" lIns="0" tIns="0" rIns="0" bIns="0" rtlCol="0" anchor="ctr"/>
+          <a:lstStyle/>
+          <a:p>
+            <a:pPr marL="0" indent="0">
+              <a:lnSpc>
+                <a:spcPct val="135000"/>
+              </a:lnSpc>
+              <a:buNone/>
+            </a:pPr>
+            <a:r>
+              <a:rPr lang="en-US" sz="1250" i="1" dirty="0">
+                <a:solidFill>
+                  <a:srgbClr val="6E9679"/>
+                </a:solidFill>
+                <a:latin typeface="Calibri" pitchFamily="34" charset="0"/>
+                <a:ea typeface="Calibri" pitchFamily="34" charset="-122"/>
+                <a:cs typeface="Calibri" pitchFamily="34" charset="-120"/>
+              </a:rPr>
+              <a:t>실패해도 포기하지 않고, 스스로 해결책을 탐색했다.</a:t>
+            </a:r>
+            <a:endParaRPr lang="en-US" sz="1250" dirty="0"/>
+          </a:p>
+        </p:txBody>
+      </p:sp>
+      <p:sp>
+        <p:nvSpPr>
+          <p:cNvPr id="26" name="Text 20"/>
+          <p:cNvSpPr/>
+          <p:nvPr/>
+        </p:nvSpPr>
+        <p:spPr>
+          <a:xfrm>
+            <a:off x="11002975" y="6446520"/>
+            <a:ext cx="914400" cy="274320"/>
+          </a:xfrm>
+          <a:prstGeom prst="rect">
+            <a:avLst/>
+          </a:prstGeom>
+          <a:noFill/>
+          <a:ln/>
+        </p:spPr>
+        <p:txBody>
+          <a:bodyPr wrap="square" lIns="0" tIns="0" rIns="0" bIns="0" rtlCol="0" anchor="ctr"/>
+          <a:lstStyle/>
+          <a:p>
+            <a:pPr marL="0" indent="0" algn="r">
+              <a:buNone/>
+            </a:pPr>
+            <a:r>
+              <a:rPr lang="en-US" sz="900" dirty="0">
+                <a:solidFill>
+                  <a:srgbClr val="6E9679"/>
+                </a:solidFill>
+                <a:latin typeface="Courier New" pitchFamily="34" charset="0"/>
+                <a:ea typeface="Courier New" pitchFamily="34" charset="-122"/>
+                <a:cs typeface="Courier New" pitchFamily="34" charset="-120"/>
+              </a:rPr>
+              <a:t>18 / 20</a:t>
+            </a:r>
+            <a:endParaRPr lang="en-US" sz="900" dirty="0"/>
+          </a:p>
+        </p:txBody>
+      </p:sp>
+    </p:spTree>
+  </p:cSld>
+  <p:clrMapOvr>
+    <a:masterClrMapping/>
+  </p:clrMapOvr>
+</p:sld>
+</file>
+
+<file path=ppt/slides/slide21.xml><?xml version="1.0" encoding="utf-8"?>
+<p:sld xmlns:a="http://schemas.openxmlformats.org/drawingml/2006/main" xmlns:r="http://schemas.openxmlformats.org/officeDocument/2006/relationships" xmlns:p="http://schemas.openxmlformats.org/presentationml/2006/main">
   <p:cSld name="Slide 19">
     <p:bg>
       <p:bgPr>
@@ -10245,7 +11310,7 @@
 </p:sld>
 </file>
 
-<file path=ppt/slides/slide21.xml><?xml version="1.0" encoding="utf-8"?>
+<file path=ppt/slides/slide22.xml><?xml version="1.0" encoding="utf-8"?>
 <p:sld xmlns:a="http://schemas.openxmlformats.org/drawingml/2006/main" xmlns:r="http://schemas.openxmlformats.org/officeDocument/2006/relationships" xmlns:p="http://schemas.openxmlformats.org/presentationml/2006/main">
   <p:cSld name="Slide 20">
     <p:bg>
@@ -11040,7 +12105,7 @@
                 <a:ea typeface="Calibri" pitchFamily="34" charset="-122"/>
                 <a:cs typeface="Calibri" pitchFamily="34" charset="-120"/>
               </a:rPr>
-              <a:t>수업용</a:t>
+              <a:t>수업</a:t>
             </a:r>
             <a:r>
               <a:rPr lang="ko-KR" altLang="en-US" sz="1600" dirty="0">
@@ -11051,7 +12116,7 @@
                 <a:ea typeface="Calibri" pitchFamily="34" charset="-122"/>
                 <a:cs typeface="Calibri" pitchFamily="34" charset="-120"/>
               </a:rPr>
-              <a:t>으로 사용할</a:t>
+              <a:t>에 사용할</a:t>
             </a:r>
             <a:r>
               <a:rPr lang="en-US" sz="1600" dirty="0">
@@ -11279,7 +12344,7 @@
                 <a:ea typeface="Calibri" pitchFamily="34" charset="-122"/>
                 <a:cs typeface="Calibri" pitchFamily="34" charset="-120"/>
               </a:rPr>
-              <a:t>저는 화들짝 놀래서 </a:t>
+              <a:t>선생임은 </a:t>
             </a:r>
             <a:r>
               <a:rPr lang="en-US" sz="1600" dirty="0">
@@ -12261,24 +13326,7 @@
                 <a:ea typeface="Calibri" pitchFamily="34" charset="-122"/>
                 <a:cs typeface="Calibri" pitchFamily="34" charset="-120"/>
               </a:rPr>
-              <a:t> 코딩을 이용해서 학생들이 자동화 프로그램 만들도록 </a:t>
-            </a:r>
-            <a:r>
-              <a:rPr kumimoji="0" lang="ko-KR" altLang="en-US" sz="1600" b="0" i="0" u="none" strike="noStrike" kern="1200" cap="none" spc="0" normalizeH="0" baseline="0" noProof="0" dirty="0" err="1">
-                <a:ln>
-                  <a:noFill/>
-                </a:ln>
-                <a:solidFill>
-                  <a:srgbClr val="E9F7EC"/>
-                </a:solidFill>
-                <a:effectLst/>
-                <a:uLnTx/>
-                <a:uFillTx/>
-                <a:latin typeface="Calibri" pitchFamily="34" charset="0"/>
-                <a:ea typeface="Calibri" pitchFamily="34" charset="-122"/>
-                <a:cs typeface="Calibri" pitchFamily="34" charset="-120"/>
-              </a:rPr>
-              <a:t>하는것</a:t>
+              <a:t> 코딩을 이용해서 학생들이 자동화 프로그램 만들도록 하는 것</a:t>
             </a:r>
             <a:endParaRPr kumimoji="0" lang="en-US" sz="1600" b="0" i="0" u="none" strike="noStrike" kern="1200" cap="none" spc="0" normalizeH="0" baseline="0" noProof="0" dirty="0">
               <a:ln>
@@ -15991,6 +17039,398 @@
 
 <file path=ppt/slides/slide6.xml><?xml version="1.0" encoding="utf-8"?>
 <p:sld xmlns:a="http://schemas.openxmlformats.org/drawingml/2006/main" xmlns:r="http://schemas.openxmlformats.org/officeDocument/2006/relationships" xmlns:p="http://schemas.openxmlformats.org/presentationml/2006/main">
+  <p:cSld>
+    <p:bg>
+      <p:bgPr>
+        <a:solidFill>
+          <a:srgbClr val="070D08"/>
+        </a:solidFill>
+        <a:effectLst/>
+      </p:bgPr>
+    </p:bg>
+    <p:spTree>
+      <p:nvGrpSpPr>
+        <p:cNvPr id="1" name=""/>
+        <p:cNvGrpSpPr/>
+        <p:nvPr/>
+      </p:nvGrpSpPr>
+      <p:grpSpPr>
+        <a:xfrm>
+          <a:off x="0" y="0"/>
+          <a:ext cx="0" cy="0"/>
+          <a:chOff x="0" y="0"/>
+          <a:chExt cx="0" cy="0"/>
+        </a:xfrm>
+      </p:grpSpPr>
+      <p:sp>
+        <p:nvSpPr>
+          <p:cNvPr id="2" name="Text 0"/>
+          <p:cNvSpPr/>
+          <p:nvPr/>
+        </p:nvSpPr>
+        <p:spPr>
+          <a:xfrm>
+            <a:off x="640080" y="457200"/>
+            <a:ext cx="7315200" cy="320040"/>
+          </a:xfrm>
+          <a:prstGeom prst="rect">
+            <a:avLst/>
+          </a:prstGeom>
+          <a:noFill/>
+          <a:ln/>
+        </p:spPr>
+        <p:txBody>
+          <a:bodyPr wrap="square" lIns="0" tIns="0" rIns="0" bIns="0" rtlCol="0" anchor="ctr"/>
+          <a:lstStyle/>
+          <a:p>
+            <a:pPr marL="0" marR="0" lvl="0" indent="0" algn="l" defTabSz="914400" rtl="0" eaLnBrk="1" fontAlgn="auto" latinLnBrk="0" hangingPunct="1">
+              <a:lnSpc>
+                <a:spcPct val="100000"/>
+              </a:lnSpc>
+              <a:spcBef>
+                <a:spcPts val="0"/>
+              </a:spcBef>
+              <a:spcAft>
+                <a:spcPts val="0"/>
+              </a:spcAft>
+              <a:buClrTx/>
+              <a:buSzTx/>
+              <a:buFontTx/>
+              <a:buNone/>
+              <a:tabLst/>
+              <a:defRPr/>
+            </a:pPr>
+            <a:r>
+              <a:rPr kumimoji="0" lang="en-US" sz="1200" b="1" i="0" u="none" strike="noStrike" kern="0" cap="none" spc="300" normalizeH="0" baseline="0" noProof="0" dirty="0">
+                <a:ln>
+                  <a:noFill/>
+                </a:ln>
+                <a:solidFill>
+                  <a:srgbClr val="17C93B"/>
+                </a:solidFill>
+                <a:effectLst/>
+                <a:uLnTx/>
+                <a:uFillTx/>
+                <a:latin typeface="Courier New" pitchFamily="34" charset="0"/>
+                <a:ea typeface="Courier New" pitchFamily="34" charset="-122"/>
+                <a:cs typeface="Courier New" pitchFamily="34" charset="-120"/>
+              </a:rPr>
+              <a:t>수업 설계</a:t>
+            </a:r>
+            <a:endParaRPr kumimoji="0" lang="en-US" sz="1200" b="0" i="0" u="none" strike="noStrike" kern="1200" cap="none" spc="0" normalizeH="0" baseline="0" noProof="0" dirty="0">
+              <a:ln>
+                <a:noFill/>
+              </a:ln>
+              <a:solidFill>
+                <a:prstClr val="black"/>
+              </a:solidFill>
+              <a:effectLst/>
+              <a:uLnTx/>
+              <a:uFillTx/>
+              <a:latin typeface="Calibri"/>
+              <a:ea typeface="+mn-ea"/>
+              <a:cs typeface="+mn-cs"/>
+            </a:endParaRPr>
+          </a:p>
+        </p:txBody>
+      </p:sp>
+      <p:sp>
+        <p:nvSpPr>
+          <p:cNvPr id="3" name="Text 1"/>
+          <p:cNvSpPr/>
+          <p:nvPr/>
+        </p:nvSpPr>
+        <p:spPr>
+          <a:xfrm>
+            <a:off x="640080" y="749808"/>
+            <a:ext cx="10881360" cy="822960"/>
+          </a:xfrm>
+          <a:prstGeom prst="rect">
+            <a:avLst/>
+          </a:prstGeom>
+          <a:noFill/>
+          <a:ln/>
+        </p:spPr>
+        <p:txBody>
+          <a:bodyPr wrap="square" lIns="0" tIns="0" rIns="0" bIns="0" rtlCol="0" anchor="ctr"/>
+          <a:lstStyle/>
+          <a:p>
+            <a:pPr marL="0" marR="0" lvl="0" indent="0" algn="l" defTabSz="914400" rtl="0" eaLnBrk="1" fontAlgn="auto" latinLnBrk="0" hangingPunct="1">
+              <a:lnSpc>
+                <a:spcPct val="105000"/>
+              </a:lnSpc>
+              <a:spcBef>
+                <a:spcPts val="0"/>
+              </a:spcBef>
+              <a:spcAft>
+                <a:spcPts val="0"/>
+              </a:spcAft>
+              <a:buClrTx/>
+              <a:buSzTx/>
+              <a:buFontTx/>
+              <a:buNone/>
+              <a:tabLst/>
+              <a:defRPr/>
+            </a:pPr>
+            <a:r>
+              <a:rPr kumimoji="0" lang="en-US" sz="3000" b="1" i="0" u="none" strike="noStrike" kern="1200" cap="none" spc="0" normalizeH="0" baseline="0" noProof="0" dirty="0">
+                <a:ln>
+                  <a:noFill/>
+                </a:ln>
+                <a:solidFill>
+                  <a:srgbClr val="FFFFFF"/>
+                </a:solidFill>
+                <a:effectLst/>
+                <a:uLnTx/>
+                <a:uFillTx/>
+                <a:latin typeface="Cambria" pitchFamily="34" charset="0"/>
+                <a:ea typeface="Cambria" pitchFamily="34" charset="-122"/>
+                <a:cs typeface="Cambria" pitchFamily="34" charset="-120"/>
+              </a:rPr>
+              <a:t>Booking 1000 Seats Competition </a:t>
+            </a:r>
+            <a:r>
+              <a:rPr kumimoji="0" lang="ko-KR" altLang="en-US" sz="3000" b="1" i="0" u="none" strike="noStrike" kern="1200" cap="none" spc="0" normalizeH="0" baseline="0" noProof="0" dirty="0">
+                <a:ln>
+                  <a:noFill/>
+                </a:ln>
+                <a:solidFill>
+                  <a:srgbClr val="FFFFFF"/>
+                </a:solidFill>
+                <a:effectLst/>
+                <a:uLnTx/>
+                <a:uFillTx/>
+                <a:latin typeface="Cambria" pitchFamily="34" charset="0"/>
+                <a:ea typeface="Cambria" pitchFamily="34" charset="-122"/>
+                <a:cs typeface="Cambria" pitchFamily="34" charset="-120"/>
+              </a:rPr>
+              <a:t>수업 진행</a:t>
+            </a:r>
+            <a:endParaRPr kumimoji="0" lang="en-US" sz="3000" b="0" i="0" u="none" strike="noStrike" kern="1200" cap="none" spc="0" normalizeH="0" baseline="0" noProof="0" dirty="0">
+              <a:ln>
+                <a:noFill/>
+              </a:ln>
+              <a:solidFill>
+                <a:prstClr val="black"/>
+              </a:solidFill>
+              <a:effectLst/>
+              <a:uLnTx/>
+              <a:uFillTx/>
+              <a:latin typeface="Calibri"/>
+              <a:ea typeface="+mn-ea"/>
+              <a:cs typeface="+mn-cs"/>
+            </a:endParaRPr>
+          </a:p>
+        </p:txBody>
+      </p:sp>
+      <p:sp>
+        <p:nvSpPr>
+          <p:cNvPr id="4" name="Shape 2"/>
+          <p:cNvSpPr/>
+          <p:nvPr/>
+        </p:nvSpPr>
+        <p:spPr>
+          <a:xfrm>
+            <a:off x="640080" y="2103120"/>
+            <a:ext cx="420624" cy="420624"/>
+          </a:xfrm>
+          <a:prstGeom prst="ellipse">
+            <a:avLst/>
+          </a:prstGeom>
+          <a:solidFill>
+            <a:srgbClr val="0E4419"/>
+          </a:solidFill>
+          <a:ln w="12700">
+            <a:solidFill>
+              <a:srgbClr val="17431F"/>
+            </a:solidFill>
+            <a:prstDash val="solid"/>
+          </a:ln>
+        </p:spPr>
+      </p:sp>
+      <p:pic>
+        <p:nvPicPr>
+          <p:cNvPr id="5" name="Image 0" descr="preencoded.png"/>
+          <p:cNvPicPr>
+            <a:picLocks noChangeAspect="1"/>
+          </p:cNvPicPr>
+          <p:nvPr/>
+        </p:nvPicPr>
+        <p:blipFill>
+          <a:blip r:embed="rId3"/>
+          <a:stretch>
+            <a:fillRect/>
+          </a:stretch>
+        </p:blipFill>
+        <p:spPr>
+          <a:xfrm>
+            <a:off x="694761" y="2157801"/>
+            <a:ext cx="311262" cy="311262"/>
+          </a:xfrm>
+          <a:prstGeom prst="rect">
+            <a:avLst/>
+          </a:prstGeom>
+        </p:spPr>
+      </p:pic>
+      <p:sp>
+        <p:nvSpPr>
+          <p:cNvPr id="6" name="Text 3"/>
+          <p:cNvSpPr/>
+          <p:nvPr/>
+        </p:nvSpPr>
+        <p:spPr>
+          <a:xfrm>
+            <a:off x="1234440" y="2121408"/>
+            <a:ext cx="5212080" cy="457200"/>
+          </a:xfrm>
+          <a:prstGeom prst="rect">
+            <a:avLst/>
+          </a:prstGeom>
+          <a:noFill/>
+          <a:ln/>
+        </p:spPr>
+        <p:txBody>
+          <a:bodyPr wrap="square" lIns="0" tIns="0" rIns="0" bIns="0" rtlCol="0" anchor="ctr"/>
+          <a:lstStyle/>
+          <a:p>
+            <a:pPr marL="0" marR="0" lvl="0" indent="0" algn="l" defTabSz="914400" rtl="0" eaLnBrk="1" fontAlgn="auto" latinLnBrk="0" hangingPunct="1">
+              <a:lnSpc>
+                <a:spcPct val="100000"/>
+              </a:lnSpc>
+              <a:spcBef>
+                <a:spcPts val="0"/>
+              </a:spcBef>
+              <a:spcAft>
+                <a:spcPts val="0"/>
+              </a:spcAft>
+              <a:buClrTx/>
+              <a:buSzTx/>
+              <a:buFontTx/>
+              <a:buNone/>
+              <a:tabLst/>
+              <a:defRPr/>
+            </a:pPr>
+            <a:r>
+              <a:rPr kumimoji="0" lang="ko-KR" altLang="en-US" sz="1450" b="0" i="0" u="none" strike="noStrike" kern="1200" cap="none" spc="0" normalizeH="0" baseline="0" noProof="0" dirty="0">
+                <a:ln>
+                  <a:noFill/>
+                </a:ln>
+                <a:solidFill>
+                  <a:srgbClr val="E9F7EC"/>
+                </a:solidFill>
+                <a:effectLst/>
+                <a:uLnTx/>
+                <a:uFillTx/>
+                <a:latin typeface="Calibri" pitchFamily="34" charset="0"/>
+                <a:ea typeface="Calibri" pitchFamily="34" charset="-122"/>
+                <a:cs typeface="Calibri" pitchFamily="34" charset="-120"/>
+              </a:rPr>
+              <a:t>미리 준비해 놓은 파이썬 자동화 프로그램을 학생들에게 공개</a:t>
+            </a:r>
+            <a:endParaRPr kumimoji="0" lang="en-US" sz="1450" b="0" i="0" u="none" strike="noStrike" kern="1200" cap="none" spc="0" normalizeH="0" baseline="0" noProof="0" dirty="0">
+              <a:ln>
+                <a:noFill/>
+              </a:ln>
+              <a:solidFill>
+                <a:prstClr val="black"/>
+              </a:solidFill>
+              <a:effectLst/>
+              <a:uLnTx/>
+              <a:uFillTx/>
+              <a:latin typeface="Calibri"/>
+              <a:ea typeface="+mn-ea"/>
+              <a:cs typeface="+mn-cs"/>
+            </a:endParaRPr>
+          </a:p>
+        </p:txBody>
+      </p:sp>
+      <p:sp>
+        <p:nvSpPr>
+          <p:cNvPr id="110" name="Text 104"/>
+          <p:cNvSpPr/>
+          <p:nvPr/>
+        </p:nvSpPr>
+        <p:spPr>
+          <a:xfrm>
+            <a:off x="11002975" y="6446520"/>
+            <a:ext cx="914400" cy="274320"/>
+          </a:xfrm>
+          <a:prstGeom prst="rect">
+            <a:avLst/>
+          </a:prstGeom>
+          <a:noFill/>
+          <a:ln/>
+        </p:spPr>
+        <p:txBody>
+          <a:bodyPr wrap="square" lIns="0" tIns="0" rIns="0" bIns="0" rtlCol="0" anchor="ctr"/>
+          <a:lstStyle/>
+          <a:p>
+            <a:pPr marL="0" marR="0" lvl="0" indent="0" algn="r" defTabSz="914400" rtl="0" eaLnBrk="1" fontAlgn="auto" latinLnBrk="0" hangingPunct="1">
+              <a:lnSpc>
+                <a:spcPct val="100000"/>
+              </a:lnSpc>
+              <a:spcBef>
+                <a:spcPts val="0"/>
+              </a:spcBef>
+              <a:spcAft>
+                <a:spcPts val="0"/>
+              </a:spcAft>
+              <a:buClrTx/>
+              <a:buSzTx/>
+              <a:buFontTx/>
+              <a:buNone/>
+              <a:tabLst/>
+              <a:defRPr/>
+            </a:pPr>
+            <a:r>
+              <a:rPr kumimoji="0" lang="en-US" sz="900" b="0" i="0" u="none" strike="noStrike" kern="1200" cap="none" spc="0" normalizeH="0" baseline="0" noProof="0" dirty="0">
+                <a:ln>
+                  <a:noFill/>
+                </a:ln>
+                <a:solidFill>
+                  <a:srgbClr val="6E9679"/>
+                </a:solidFill>
+                <a:effectLst/>
+                <a:uLnTx/>
+                <a:uFillTx/>
+                <a:latin typeface="Courier New" pitchFamily="34" charset="0"/>
+                <a:ea typeface="Courier New" pitchFamily="34" charset="-122"/>
+                <a:cs typeface="Courier New" pitchFamily="34" charset="-120"/>
+              </a:rPr>
+              <a:t>4 / 20</a:t>
+            </a:r>
+            <a:endParaRPr kumimoji="0" lang="en-US" sz="900" b="0" i="0" u="none" strike="noStrike" kern="1200" cap="none" spc="0" normalizeH="0" baseline="0" noProof="0" dirty="0">
+              <a:ln>
+                <a:noFill/>
+              </a:ln>
+              <a:solidFill>
+                <a:prstClr val="black"/>
+              </a:solidFill>
+              <a:effectLst/>
+              <a:uLnTx/>
+              <a:uFillTx/>
+              <a:latin typeface="Calibri"/>
+              <a:ea typeface="+mn-ea"/>
+              <a:cs typeface="+mn-cs"/>
+            </a:endParaRPr>
+          </a:p>
+        </p:txBody>
+      </p:sp>
+    </p:spTree>
+    <p:extLst>
+      <p:ext uri="{BB962C8B-B14F-4D97-AF65-F5344CB8AC3E}">
+        <p14:creationId xmlns:p14="http://schemas.microsoft.com/office/powerpoint/2010/main" val="2005237463"/>
+      </p:ext>
+    </p:extLst>
+  </p:cSld>
+  <p:clrMapOvr>
+    <a:masterClrMapping/>
+  </p:clrMapOvr>
+</p:sld>
+</file>
+
+<file path=ppt/slides/slide7.xml><?xml version="1.0" encoding="utf-8"?>
+<p:sld xmlns:a="http://schemas.openxmlformats.org/drawingml/2006/main" xmlns:r="http://schemas.openxmlformats.org/officeDocument/2006/relationships" xmlns:p="http://schemas.openxmlformats.org/presentationml/2006/main">
   <p:cSld name="Slide 5">
     <p:bg>
       <p:bgPr>
@@ -16673,7 +18113,7 @@
 </p:sld>
 </file>
 
-<file path=ppt/slides/slide7.xml><?xml version="1.0" encoding="utf-8"?>
+<file path=ppt/slides/slide8.xml><?xml version="1.0" encoding="utf-8"?>
 <p:sld xmlns:a="http://schemas.openxmlformats.org/drawingml/2006/main" xmlns:r="http://schemas.openxmlformats.org/officeDocument/2006/relationships" xmlns:p="http://schemas.openxmlformats.org/presentationml/2006/main">
   <p:cSld name="Slide 6">
     <p:bg>
@@ -17266,7 +18706,7 @@
 </p:sld>
 </file>
 
-<file path=ppt/slides/slide8.xml><?xml version="1.0" encoding="utf-8"?>
+<file path=ppt/slides/slide9.xml><?xml version="1.0" encoding="utf-8"?>
 <p:sld xmlns:a="http://schemas.openxmlformats.org/drawingml/2006/main" xmlns:r="http://schemas.openxmlformats.org/officeDocument/2006/relationships" xmlns:p="http://schemas.openxmlformats.org/presentationml/2006/main">
   <p:cSld name="Slide 7">
     <p:bg>
@@ -17452,926 +18892,6 @@
                 <a:cs typeface="Courier New" pitchFamily="34" charset="-120"/>
               </a:rPr>
               <a:t>7 / 20</a:t>
-            </a:r>
-            <a:endParaRPr lang="en-US" sz="900" dirty="0"/>
-          </a:p>
-        </p:txBody>
-      </p:sp>
-    </p:spTree>
-  </p:cSld>
-  <p:clrMapOvr>
-    <a:masterClrMapping/>
-  </p:clrMapOvr>
-</p:sld>
-</file>
-
-<file path=ppt/slides/slide9.xml><?xml version="1.0" encoding="utf-8"?>
-<p:sld xmlns:a="http://schemas.openxmlformats.org/drawingml/2006/main" xmlns:r="http://schemas.openxmlformats.org/officeDocument/2006/relationships" xmlns:p="http://schemas.openxmlformats.org/presentationml/2006/main">
-  <p:cSld name="Slide 8">
-    <p:bg>
-      <p:bgPr>
-        <a:solidFill>
-          <a:srgbClr val="070D08"/>
-        </a:solidFill>
-        <a:effectLst/>
-      </p:bgPr>
-    </p:bg>
-    <p:spTree>
-      <p:nvGrpSpPr>
-        <p:cNvPr id="1" name=""/>
-        <p:cNvGrpSpPr/>
-        <p:nvPr/>
-      </p:nvGrpSpPr>
-      <p:grpSpPr>
-        <a:xfrm>
-          <a:off x="0" y="0"/>
-          <a:ext cx="0" cy="0"/>
-          <a:chOff x="0" y="0"/>
-          <a:chExt cx="0" cy="0"/>
-        </a:xfrm>
-      </p:grpSpPr>
-      <p:sp>
-        <p:nvSpPr>
-          <p:cNvPr id="2" name="Text 0"/>
-          <p:cNvSpPr/>
-          <p:nvPr/>
-        </p:nvSpPr>
-        <p:spPr>
-          <a:xfrm>
-            <a:off x="640080" y="457200"/>
-            <a:ext cx="7315200" cy="320040"/>
-          </a:xfrm>
-          <a:prstGeom prst="rect">
-            <a:avLst/>
-          </a:prstGeom>
-          <a:noFill/>
-          <a:ln/>
-        </p:spPr>
-        <p:txBody>
-          <a:bodyPr wrap="square" lIns="0" tIns="0" rIns="0" bIns="0" rtlCol="0" anchor="ctr"/>
-          <a:lstStyle/>
-          <a:p>
-            <a:pPr marL="0" indent="0">
-              <a:buNone/>
-            </a:pPr>
-            <a:r>
-              <a:rPr lang="en-US" sz="1200" b="1" kern="0" spc="300" dirty="0">
-                <a:solidFill>
-                  <a:srgbClr val="17C93B"/>
-                </a:solidFill>
-                <a:latin typeface="Courier New" pitchFamily="34" charset="0"/>
-                <a:ea typeface="Courier New" pitchFamily="34" charset="-122"/>
-                <a:cs typeface="Courier New" pitchFamily="34" charset="-120"/>
-              </a:rPr>
-              <a:t>1라운드 · 원인</a:t>
-            </a:r>
-            <a:endParaRPr lang="en-US" sz="1200" dirty="0"/>
-          </a:p>
-        </p:txBody>
-      </p:sp>
-      <p:sp>
-        <p:nvSpPr>
-          <p:cNvPr id="3" name="Text 1"/>
-          <p:cNvSpPr/>
-          <p:nvPr/>
-        </p:nvSpPr>
-        <p:spPr>
-          <a:xfrm>
-            <a:off x="640080" y="749808"/>
-            <a:ext cx="10881360" cy="822960"/>
-          </a:xfrm>
-          <a:prstGeom prst="rect">
-            <a:avLst/>
-          </a:prstGeom>
-          <a:noFill/>
-          <a:ln/>
-        </p:spPr>
-        <p:txBody>
-          <a:bodyPr wrap="square" lIns="0" tIns="0" rIns="0" bIns="0" rtlCol="0" anchor="ctr"/>
-          <a:lstStyle/>
-          <a:p>
-            <a:pPr marL="0" indent="0">
-              <a:lnSpc>
-                <a:spcPct val="105000"/>
-              </a:lnSpc>
-              <a:buNone/>
-            </a:pPr>
-            <a:r>
-              <a:rPr lang="en-US" sz="3000" b="1" dirty="0">
-                <a:solidFill>
-                  <a:srgbClr val="FFFFFF"/>
-                </a:solidFill>
-                <a:latin typeface="Cambria" pitchFamily="34" charset="0"/>
-                <a:ea typeface="Cambria" pitchFamily="34" charset="-122"/>
-                <a:cs typeface="Cambria" pitchFamily="34" charset="-120"/>
-              </a:rPr>
-              <a:t>AI로 딸깍, 그런데 열려 있었다</a:t>
-            </a:r>
-            <a:endParaRPr lang="en-US" sz="3000" dirty="0"/>
-          </a:p>
-        </p:txBody>
-      </p:sp>
-      <p:sp>
-        <p:nvSpPr>
-          <p:cNvPr id="4" name="Shape 2"/>
-          <p:cNvSpPr/>
-          <p:nvPr/>
-        </p:nvSpPr>
-        <p:spPr>
-          <a:xfrm>
-            <a:off x="640080" y="2377440"/>
-            <a:ext cx="2331720" cy="2103120"/>
-          </a:xfrm>
-          <a:prstGeom prst="roundRect">
-            <a:avLst>
-              <a:gd name="adj" fmla="val 3478"/>
-            </a:avLst>
-          </a:prstGeom>
-          <a:solidFill>
-            <a:srgbClr val="0E1A0F"/>
-          </a:solidFill>
-          <a:ln w="9525">
-            <a:solidFill>
-              <a:srgbClr val="17431F"/>
-            </a:solidFill>
-            <a:prstDash val="solid"/>
-          </a:ln>
-          <a:effectLst>
-            <a:outerShdw blurRad="101600" dist="38100" dir="5400000" algn="bl" rotWithShape="0">
-              <a:srgbClr val="000000">
-                <a:alpha val="50000"/>
-              </a:srgbClr>
-            </a:outerShdw>
-          </a:effectLst>
-        </p:spPr>
-      </p:sp>
-      <p:sp>
-        <p:nvSpPr>
-          <p:cNvPr id="5" name="Shape 3"/>
-          <p:cNvSpPr/>
-          <p:nvPr/>
-        </p:nvSpPr>
-        <p:spPr>
-          <a:xfrm>
-            <a:off x="1485900" y="2697480"/>
-            <a:ext cx="640080" cy="640080"/>
-          </a:xfrm>
-          <a:prstGeom prst="ellipse">
-            <a:avLst/>
-          </a:prstGeom>
-          <a:solidFill>
-            <a:srgbClr val="0E4419"/>
-          </a:solidFill>
-          <a:ln w="12700">
-            <a:solidFill>
-              <a:srgbClr val="17431F"/>
-            </a:solidFill>
-            <a:prstDash val="solid"/>
-          </a:ln>
-        </p:spPr>
-      </p:sp>
-      <p:pic>
-        <p:nvPicPr>
-          <p:cNvPr id="6" name="Image 0" descr="preencoded.png"/>
-          <p:cNvPicPr>
-            <a:picLocks noChangeAspect="1"/>
-          </p:cNvPicPr>
-          <p:nvPr/>
-        </p:nvPicPr>
-        <p:blipFill>
-          <a:blip r:embed="rId3"/>
-          <a:stretch>
-            <a:fillRect/>
-          </a:stretch>
-        </p:blipFill>
-        <p:spPr>
-          <a:xfrm>
-            <a:off x="1569110" y="2780690"/>
-            <a:ext cx="473659" cy="473659"/>
-          </a:xfrm>
-          <a:prstGeom prst="rect">
-            <a:avLst/>
-          </a:prstGeom>
-        </p:spPr>
-      </p:pic>
-      <p:sp>
-        <p:nvSpPr>
-          <p:cNvPr id="7" name="Text 4"/>
-          <p:cNvSpPr/>
-          <p:nvPr/>
-        </p:nvSpPr>
-        <p:spPr>
-          <a:xfrm>
-            <a:off x="777240" y="3474720"/>
-            <a:ext cx="2057400" cy="457200"/>
-          </a:xfrm>
-          <a:prstGeom prst="rect">
-            <a:avLst/>
-          </a:prstGeom>
-          <a:noFill/>
-          <a:ln/>
-        </p:spPr>
-        <p:txBody>
-          <a:bodyPr wrap="square" lIns="0" tIns="0" rIns="0" bIns="0" rtlCol="0" anchor="ctr"/>
-          <a:lstStyle/>
-          <a:p>
-            <a:pPr marL="0" indent="0" algn="ctr">
-              <a:buNone/>
-            </a:pPr>
-            <a:r>
-              <a:rPr lang="en-US" sz="1300" b="1" dirty="0">
-                <a:solidFill>
-                  <a:srgbClr val="E9F7EC"/>
-                </a:solidFill>
-                <a:latin typeface="Calibri" pitchFamily="34" charset="0"/>
-                <a:ea typeface="Calibri" pitchFamily="34" charset="-122"/>
-                <a:cs typeface="Calibri" pitchFamily="34" charset="-120"/>
-              </a:rPr>
-              <a:t>F12 개발자 도구</a:t>
-            </a:r>
-            <a:endParaRPr lang="en-US" sz="1300" dirty="0"/>
-          </a:p>
-        </p:txBody>
-      </p:sp>
-      <p:sp>
-        <p:nvSpPr>
-          <p:cNvPr id="8" name="Text 5"/>
-          <p:cNvSpPr/>
-          <p:nvPr/>
-        </p:nvSpPr>
-        <p:spPr>
-          <a:xfrm>
-            <a:off x="777240" y="3913632"/>
-            <a:ext cx="2057400" cy="502920"/>
-          </a:xfrm>
-          <a:prstGeom prst="rect">
-            <a:avLst/>
-          </a:prstGeom>
-          <a:noFill/>
-          <a:ln/>
-        </p:spPr>
-        <p:txBody>
-          <a:bodyPr wrap="square" lIns="0" tIns="0" rIns="0" bIns="0" rtlCol="0" anchor="ctr"/>
-          <a:lstStyle/>
-          <a:p>
-            <a:pPr marL="0" indent="0" algn="ctr">
-              <a:lnSpc>
-                <a:spcPct val="120000"/>
-              </a:lnSpc>
-              <a:buNone/>
-            </a:pPr>
-            <a:r>
-              <a:rPr lang="en-US" sz="1050" dirty="0">
-                <a:solidFill>
-                  <a:srgbClr val="6E9679"/>
-                </a:solidFill>
-                <a:latin typeface="Calibri" pitchFamily="34" charset="0"/>
-                <a:ea typeface="Calibri" pitchFamily="34" charset="-122"/>
-                <a:cs typeface="Calibri" pitchFamily="34" charset="-120"/>
-              </a:rPr>
-              <a:t>네트워크 탭에 요청이 그대로</a:t>
-            </a:r>
-            <a:endParaRPr lang="en-US" sz="1050" dirty="0"/>
-          </a:p>
-        </p:txBody>
-      </p:sp>
-      <p:sp>
-        <p:nvSpPr>
-          <p:cNvPr id="9" name="Shape 6"/>
-          <p:cNvSpPr/>
-          <p:nvPr/>
-        </p:nvSpPr>
-        <p:spPr>
-          <a:xfrm>
-            <a:off x="3026664" y="3429000"/>
-            <a:ext cx="418490" cy="9144"/>
-          </a:xfrm>
-          <a:prstGeom prst="line">
-            <a:avLst/>
-          </a:prstGeom>
-          <a:noFill/>
-          <a:ln w="19050">
-            <a:solidFill>
-              <a:srgbClr val="17C93B"/>
-            </a:solidFill>
-            <a:prstDash val="solid"/>
-            <a:tailEnd type="triangle"/>
-          </a:ln>
-        </p:spPr>
-      </p:sp>
-      <p:sp>
-        <p:nvSpPr>
-          <p:cNvPr id="10" name="Shape 7"/>
-          <p:cNvSpPr/>
-          <p:nvPr/>
-        </p:nvSpPr>
-        <p:spPr>
-          <a:xfrm>
-            <a:off x="3500018" y="2377440"/>
-            <a:ext cx="2331720" cy="2103120"/>
-          </a:xfrm>
-          <a:prstGeom prst="roundRect">
-            <a:avLst>
-              <a:gd name="adj" fmla="val 3478"/>
-            </a:avLst>
-          </a:prstGeom>
-          <a:solidFill>
-            <a:srgbClr val="0E1A0F"/>
-          </a:solidFill>
-          <a:ln w="9525">
-            <a:solidFill>
-              <a:srgbClr val="17431F"/>
-            </a:solidFill>
-            <a:prstDash val="solid"/>
-          </a:ln>
-          <a:effectLst>
-            <a:outerShdw blurRad="101600" dist="38100" dir="5400000" algn="bl" rotWithShape="0">
-              <a:srgbClr val="000000">
-                <a:alpha val="50000"/>
-              </a:srgbClr>
-            </a:outerShdw>
-          </a:effectLst>
-        </p:spPr>
-      </p:sp>
-      <p:sp>
-        <p:nvSpPr>
-          <p:cNvPr id="11" name="Shape 8"/>
-          <p:cNvSpPr/>
-          <p:nvPr/>
-        </p:nvSpPr>
-        <p:spPr>
-          <a:xfrm>
-            <a:off x="4345838" y="2697480"/>
-            <a:ext cx="640080" cy="640080"/>
-          </a:xfrm>
-          <a:prstGeom prst="ellipse">
-            <a:avLst/>
-          </a:prstGeom>
-          <a:solidFill>
-            <a:srgbClr val="0E4419"/>
-          </a:solidFill>
-          <a:ln w="12700">
-            <a:solidFill>
-              <a:srgbClr val="17431F"/>
-            </a:solidFill>
-            <a:prstDash val="solid"/>
-          </a:ln>
-        </p:spPr>
-      </p:sp>
-      <p:pic>
-        <p:nvPicPr>
-          <p:cNvPr id="12" name="Image 1" descr="preencoded.png"/>
-          <p:cNvPicPr>
-            <a:picLocks noChangeAspect="1"/>
-          </p:cNvPicPr>
-          <p:nvPr/>
-        </p:nvPicPr>
-        <p:blipFill>
-          <a:blip r:embed="rId4"/>
-          <a:stretch>
-            <a:fillRect/>
-          </a:stretch>
-        </p:blipFill>
-        <p:spPr>
-          <a:xfrm>
-            <a:off x="4429049" y="2780690"/>
-            <a:ext cx="473659" cy="473659"/>
-          </a:xfrm>
-          <a:prstGeom prst="rect">
-            <a:avLst/>
-          </a:prstGeom>
-        </p:spPr>
-      </p:pic>
-      <p:sp>
-        <p:nvSpPr>
-          <p:cNvPr id="13" name="Text 9"/>
-          <p:cNvSpPr/>
-          <p:nvPr/>
-        </p:nvSpPr>
-        <p:spPr>
-          <a:xfrm>
-            <a:off x="3637178" y="3474720"/>
-            <a:ext cx="2057400" cy="457200"/>
-          </a:xfrm>
-          <a:prstGeom prst="rect">
-            <a:avLst/>
-          </a:prstGeom>
-          <a:noFill/>
-          <a:ln/>
-        </p:spPr>
-        <p:txBody>
-          <a:bodyPr wrap="square" lIns="0" tIns="0" rIns="0" bIns="0" rtlCol="0" anchor="ctr"/>
-          <a:lstStyle/>
-          <a:p>
-            <a:pPr marL="0" indent="0" algn="ctr">
-              <a:buNone/>
-            </a:pPr>
-            <a:r>
-              <a:rPr lang="en-US" sz="1300" b="1" dirty="0">
-                <a:solidFill>
-                  <a:srgbClr val="E9F7EC"/>
-                </a:solidFill>
-                <a:latin typeface="Calibri" pitchFamily="34" charset="0"/>
-                <a:ea typeface="Calibri" pitchFamily="34" charset="-122"/>
-                <a:cs typeface="Calibri" pitchFamily="34" charset="-120"/>
-              </a:rPr>
-              <a:t>API 키·DB URL 노출</a:t>
-            </a:r>
-            <a:endParaRPr lang="en-US" sz="1300" dirty="0"/>
-          </a:p>
-        </p:txBody>
-      </p:sp>
-      <p:sp>
-        <p:nvSpPr>
-          <p:cNvPr id="14" name="Text 10"/>
-          <p:cNvSpPr/>
-          <p:nvPr/>
-        </p:nvSpPr>
-        <p:spPr>
-          <a:xfrm>
-            <a:off x="3637178" y="3913632"/>
-            <a:ext cx="2057400" cy="502920"/>
-          </a:xfrm>
-          <a:prstGeom prst="rect">
-            <a:avLst/>
-          </a:prstGeom>
-          <a:noFill/>
-          <a:ln/>
-        </p:spPr>
-        <p:txBody>
-          <a:bodyPr wrap="square" lIns="0" tIns="0" rIns="0" bIns="0" rtlCol="0" anchor="ctr"/>
-          <a:lstStyle/>
-          <a:p>
-            <a:pPr marL="0" indent="0" algn="ctr">
-              <a:lnSpc>
-                <a:spcPct val="120000"/>
-              </a:lnSpc>
-              <a:buNone/>
-            </a:pPr>
-            <a:r>
-              <a:rPr lang="en-US" sz="1050" dirty="0">
-                <a:solidFill>
-                  <a:srgbClr val="6E9679"/>
-                </a:solidFill>
-                <a:latin typeface="Calibri" pitchFamily="34" charset="0"/>
-                <a:ea typeface="Calibri" pitchFamily="34" charset="-122"/>
-                <a:cs typeface="Calibri" pitchFamily="34" charset="-120"/>
-              </a:rPr>
-              <a:t>Firebase 설정이 코드에 그대로</a:t>
-            </a:r>
-            <a:endParaRPr lang="en-US" sz="1050" dirty="0"/>
-          </a:p>
-        </p:txBody>
-      </p:sp>
-      <p:sp>
-        <p:nvSpPr>
-          <p:cNvPr id="15" name="Shape 11"/>
-          <p:cNvSpPr/>
-          <p:nvPr/>
-        </p:nvSpPr>
-        <p:spPr>
-          <a:xfrm>
-            <a:off x="5886602" y="3429000"/>
-            <a:ext cx="418490" cy="9144"/>
-          </a:xfrm>
-          <a:prstGeom prst="line">
-            <a:avLst/>
-          </a:prstGeom>
-          <a:noFill/>
-          <a:ln w="19050">
-            <a:solidFill>
-              <a:srgbClr val="17C93B"/>
-            </a:solidFill>
-            <a:prstDash val="solid"/>
-            <a:tailEnd type="triangle"/>
-          </a:ln>
-        </p:spPr>
-      </p:sp>
-      <p:sp>
-        <p:nvSpPr>
-          <p:cNvPr id="16" name="Shape 12"/>
-          <p:cNvSpPr/>
-          <p:nvPr/>
-        </p:nvSpPr>
-        <p:spPr>
-          <a:xfrm>
-            <a:off x="6359957" y="2377440"/>
-            <a:ext cx="2331720" cy="2103120"/>
-          </a:xfrm>
-          <a:prstGeom prst="roundRect">
-            <a:avLst>
-              <a:gd name="adj" fmla="val 3478"/>
-            </a:avLst>
-          </a:prstGeom>
-          <a:solidFill>
-            <a:srgbClr val="0E1A0F"/>
-          </a:solidFill>
-          <a:ln w="9525">
-            <a:solidFill>
-              <a:srgbClr val="17431F"/>
-            </a:solidFill>
-            <a:prstDash val="solid"/>
-          </a:ln>
-          <a:effectLst>
-            <a:outerShdw blurRad="101600" dist="38100" dir="5400000" algn="bl" rotWithShape="0">
-              <a:srgbClr val="000000">
-                <a:alpha val="50000"/>
-              </a:srgbClr>
-            </a:outerShdw>
-          </a:effectLst>
-        </p:spPr>
-      </p:sp>
-      <p:sp>
-        <p:nvSpPr>
-          <p:cNvPr id="17" name="Shape 13"/>
-          <p:cNvSpPr/>
-          <p:nvPr/>
-        </p:nvSpPr>
-        <p:spPr>
-          <a:xfrm>
-            <a:off x="7205777" y="2697480"/>
-            <a:ext cx="640080" cy="640080"/>
-          </a:xfrm>
-          <a:prstGeom prst="ellipse">
-            <a:avLst/>
-          </a:prstGeom>
-          <a:solidFill>
-            <a:srgbClr val="0E4419"/>
-          </a:solidFill>
-          <a:ln w="12700">
-            <a:solidFill>
-              <a:srgbClr val="17431F"/>
-            </a:solidFill>
-            <a:prstDash val="solid"/>
-          </a:ln>
-        </p:spPr>
-      </p:sp>
-      <p:pic>
-        <p:nvPicPr>
-          <p:cNvPr id="18" name="Image 2" descr="preencoded.png"/>
-          <p:cNvPicPr>
-            <a:picLocks noChangeAspect="1"/>
-          </p:cNvPicPr>
-          <p:nvPr/>
-        </p:nvPicPr>
-        <p:blipFill>
-          <a:blip r:embed="rId5"/>
-          <a:stretch>
-            <a:fillRect/>
-          </a:stretch>
-        </p:blipFill>
-        <p:spPr>
-          <a:xfrm>
-            <a:off x="7288987" y="2780690"/>
-            <a:ext cx="473659" cy="473659"/>
-          </a:xfrm>
-          <a:prstGeom prst="rect">
-            <a:avLst/>
-          </a:prstGeom>
-        </p:spPr>
-      </p:pic>
-      <p:sp>
-        <p:nvSpPr>
-          <p:cNvPr id="19" name="Text 14"/>
-          <p:cNvSpPr/>
-          <p:nvPr/>
-        </p:nvSpPr>
-        <p:spPr>
-          <a:xfrm>
-            <a:off x="6497117" y="3474720"/>
-            <a:ext cx="2057400" cy="457200"/>
-          </a:xfrm>
-          <a:prstGeom prst="rect">
-            <a:avLst/>
-          </a:prstGeom>
-          <a:noFill/>
-          <a:ln/>
-        </p:spPr>
-        <p:txBody>
-          <a:bodyPr wrap="square" lIns="0" tIns="0" rIns="0" bIns="0" rtlCol="0" anchor="ctr"/>
-          <a:lstStyle/>
-          <a:p>
-            <a:pPr marL="0" indent="0" algn="ctr">
-              <a:buNone/>
-            </a:pPr>
-            <a:r>
-              <a:rPr lang="en-US" sz="1300" b="1" dirty="0">
-                <a:solidFill>
-                  <a:srgbClr val="E9F7EC"/>
-                </a:solidFill>
-                <a:latin typeface="Calibri" pitchFamily="34" charset="0"/>
-                <a:ea typeface="Calibri" pitchFamily="34" charset="-122"/>
-                <a:cs typeface="Calibri" pitchFamily="34" charset="-120"/>
-              </a:rPr>
-              <a:t>Rules 전면 개방</a:t>
-            </a:r>
-            <a:endParaRPr lang="en-US" sz="1300" dirty="0"/>
-          </a:p>
-        </p:txBody>
-      </p:sp>
-      <p:sp>
-        <p:nvSpPr>
-          <p:cNvPr id="20" name="Text 15"/>
-          <p:cNvSpPr/>
-          <p:nvPr/>
-        </p:nvSpPr>
-        <p:spPr>
-          <a:xfrm>
-            <a:off x="6497117" y="3913632"/>
-            <a:ext cx="2057400" cy="502920"/>
-          </a:xfrm>
-          <a:prstGeom prst="rect">
-            <a:avLst/>
-          </a:prstGeom>
-          <a:noFill/>
-          <a:ln/>
-        </p:spPr>
-        <p:txBody>
-          <a:bodyPr wrap="square" lIns="0" tIns="0" rIns="0" bIns="0" rtlCol="0" anchor="ctr"/>
-          <a:lstStyle/>
-          <a:p>
-            <a:pPr marL="0" indent="0" algn="ctr">
-              <a:lnSpc>
-                <a:spcPct val="120000"/>
-              </a:lnSpc>
-              <a:buNone/>
-            </a:pPr>
-            <a:r>
-              <a:rPr lang="en-US" sz="1050" dirty="0">
-                <a:solidFill>
-                  <a:srgbClr val="6E9679"/>
-                </a:solidFill>
-                <a:latin typeface="Calibri" pitchFamily="34" charset="0"/>
-                <a:ea typeface="Calibri" pitchFamily="34" charset="-122"/>
-                <a:cs typeface="Calibri" pitchFamily="34" charset="-120"/>
-              </a:rPr>
-              <a:t>누구나 읽고 쓸 수 있는 상태</a:t>
-            </a:r>
-            <a:endParaRPr lang="en-US" sz="1050" dirty="0"/>
-          </a:p>
-        </p:txBody>
-      </p:sp>
-      <p:sp>
-        <p:nvSpPr>
-          <p:cNvPr id="21" name="Shape 16"/>
-          <p:cNvSpPr/>
-          <p:nvPr/>
-        </p:nvSpPr>
-        <p:spPr>
-          <a:xfrm>
-            <a:off x="8746541" y="3429000"/>
-            <a:ext cx="418490" cy="9144"/>
-          </a:xfrm>
-          <a:prstGeom prst="line">
-            <a:avLst/>
-          </a:prstGeom>
-          <a:noFill/>
-          <a:ln w="19050">
-            <a:solidFill>
-              <a:srgbClr val="17C93B"/>
-            </a:solidFill>
-            <a:prstDash val="solid"/>
-            <a:tailEnd type="triangle"/>
-          </a:ln>
-        </p:spPr>
-      </p:sp>
-      <p:sp>
-        <p:nvSpPr>
-          <p:cNvPr id="22" name="Shape 17"/>
-          <p:cNvSpPr/>
-          <p:nvPr/>
-        </p:nvSpPr>
-        <p:spPr>
-          <a:xfrm>
-            <a:off x="9219895" y="2377440"/>
-            <a:ext cx="2331720" cy="2103120"/>
-          </a:xfrm>
-          <a:prstGeom prst="roundRect">
-            <a:avLst>
-              <a:gd name="adj" fmla="val 3478"/>
-            </a:avLst>
-          </a:prstGeom>
-          <a:solidFill>
-            <a:srgbClr val="3A0F17"/>
-          </a:solidFill>
-          <a:ln w="9525">
-            <a:solidFill>
-              <a:srgbClr val="17431F"/>
-            </a:solidFill>
-            <a:prstDash val="solid"/>
-          </a:ln>
-          <a:effectLst>
-            <a:outerShdw blurRad="101600" dist="38100" dir="5400000" algn="bl" rotWithShape="0">
-              <a:srgbClr val="000000">
-                <a:alpha val="50000"/>
-              </a:srgbClr>
-            </a:outerShdw>
-          </a:effectLst>
-        </p:spPr>
-      </p:sp>
-      <p:sp>
-        <p:nvSpPr>
-          <p:cNvPr id="23" name="Shape 18"/>
-          <p:cNvSpPr/>
-          <p:nvPr/>
-        </p:nvSpPr>
-        <p:spPr>
-          <a:xfrm>
-            <a:off x="10065715" y="2697480"/>
-            <a:ext cx="640080" cy="640080"/>
-          </a:xfrm>
-          <a:prstGeom prst="ellipse">
-            <a:avLst/>
-          </a:prstGeom>
-          <a:solidFill>
-            <a:srgbClr val="3A0F17"/>
-          </a:solidFill>
-          <a:ln w="12700">
-            <a:solidFill>
-              <a:srgbClr val="3A0F17"/>
-            </a:solidFill>
-            <a:prstDash val="solid"/>
-          </a:ln>
-        </p:spPr>
-      </p:sp>
-      <p:pic>
-        <p:nvPicPr>
-          <p:cNvPr id="24" name="Image 3" descr="preencoded.png"/>
-          <p:cNvPicPr>
-            <a:picLocks noChangeAspect="1"/>
-          </p:cNvPicPr>
-          <p:nvPr/>
-        </p:nvPicPr>
-        <p:blipFill>
-          <a:blip r:embed="rId6"/>
-          <a:stretch>
-            <a:fillRect/>
-          </a:stretch>
-        </p:blipFill>
-        <p:spPr>
-          <a:xfrm>
-            <a:off x="10148926" y="2780690"/>
-            <a:ext cx="473659" cy="473659"/>
-          </a:xfrm>
-          <a:prstGeom prst="rect">
-            <a:avLst/>
-          </a:prstGeom>
-        </p:spPr>
-      </p:pic>
-      <p:sp>
-        <p:nvSpPr>
-          <p:cNvPr id="25" name="Text 19"/>
-          <p:cNvSpPr/>
-          <p:nvPr/>
-        </p:nvSpPr>
-        <p:spPr>
-          <a:xfrm>
-            <a:off x="9357055" y="3474720"/>
-            <a:ext cx="2057400" cy="457200"/>
-          </a:xfrm>
-          <a:prstGeom prst="rect">
-            <a:avLst/>
-          </a:prstGeom>
-          <a:noFill/>
-          <a:ln/>
-        </p:spPr>
-        <p:txBody>
-          <a:bodyPr wrap="square" lIns="0" tIns="0" rIns="0" bIns="0" rtlCol="0" anchor="ctr"/>
-          <a:lstStyle/>
-          <a:p>
-            <a:pPr marL="0" indent="0" algn="ctr">
-              <a:buNone/>
-            </a:pPr>
-            <a:r>
-              <a:rPr lang="en-US" sz="1300" b="1" dirty="0">
-                <a:solidFill>
-                  <a:srgbClr val="E9F7EC"/>
-                </a:solidFill>
-                <a:latin typeface="Calibri" pitchFamily="34" charset="0"/>
-                <a:ea typeface="Calibri" pitchFamily="34" charset="-122"/>
-                <a:cs typeface="Calibri" pitchFamily="34" charset="-120"/>
-              </a:rPr>
-              <a:t>DB 직접 접근</a:t>
-            </a:r>
-            <a:endParaRPr lang="en-US" sz="1300" dirty="0"/>
-          </a:p>
-        </p:txBody>
-      </p:sp>
-      <p:sp>
-        <p:nvSpPr>
-          <p:cNvPr id="26" name="Text 20"/>
-          <p:cNvSpPr/>
-          <p:nvPr/>
-        </p:nvSpPr>
-        <p:spPr>
-          <a:xfrm>
-            <a:off x="9357055" y="3913632"/>
-            <a:ext cx="2057400" cy="502920"/>
-          </a:xfrm>
-          <a:prstGeom prst="rect">
-            <a:avLst/>
-          </a:prstGeom>
-          <a:noFill/>
-          <a:ln/>
-        </p:spPr>
-        <p:txBody>
-          <a:bodyPr wrap="square" lIns="0" tIns="0" rIns="0" bIns="0" rtlCol="0" anchor="ctr"/>
-          <a:lstStyle/>
-          <a:p>
-            <a:pPr marL="0" indent="0" algn="ctr">
-              <a:lnSpc>
-                <a:spcPct val="120000"/>
-              </a:lnSpc>
-              <a:buNone/>
-            </a:pPr>
-            <a:r>
-              <a:rPr lang="en-US" sz="1050" dirty="0">
-                <a:solidFill>
-                  <a:srgbClr val="6E9679"/>
-                </a:solidFill>
-                <a:latin typeface="Calibri" pitchFamily="34" charset="0"/>
-                <a:ea typeface="Calibri" pitchFamily="34" charset="-122"/>
-                <a:cs typeface="Calibri" pitchFamily="34" charset="-120"/>
-              </a:rPr>
-              <a:t>학생이 Firebase에 곧장 기록</a:t>
-            </a:r>
-            <a:endParaRPr lang="en-US" sz="1050" dirty="0"/>
-          </a:p>
-        </p:txBody>
-      </p:sp>
-      <p:sp>
-        <p:nvSpPr>
-          <p:cNvPr id="27" name="Text 21"/>
-          <p:cNvSpPr/>
-          <p:nvPr/>
-        </p:nvSpPr>
-        <p:spPr>
-          <a:xfrm>
-            <a:off x="640080" y="5120640"/>
-            <a:ext cx="10058400" cy="457200"/>
-          </a:xfrm>
-          <a:prstGeom prst="rect">
-            <a:avLst/>
-          </a:prstGeom>
-          <a:noFill/>
-          <a:ln/>
-        </p:spPr>
-        <p:txBody>
-          <a:bodyPr wrap="square" lIns="0" tIns="0" rIns="0" bIns="0" rtlCol="0" anchor="ctr"/>
-          <a:lstStyle/>
-          <a:p>
-            <a:pPr marL="0" indent="0">
-              <a:buNone/>
-            </a:pPr>
-            <a:r>
-              <a:rPr lang="en-US" sz="1500" i="1" dirty="0">
-                <a:solidFill>
-                  <a:srgbClr val="17C93B"/>
-                </a:solidFill>
-                <a:latin typeface="Calibri" pitchFamily="34" charset="0"/>
-                <a:ea typeface="Calibri" pitchFamily="34" charset="-122"/>
-                <a:cs typeface="Calibri" pitchFamily="34" charset="-120"/>
-              </a:rPr>
-              <a:t>“ 상대는 저와 똑같이 AI를 돌리는 중학생이라는 사실을 간과했다. ”</a:t>
-            </a:r>
-            <a:endParaRPr lang="en-US" sz="1500" dirty="0"/>
-          </a:p>
-        </p:txBody>
-      </p:sp>
-      <p:sp>
-        <p:nvSpPr>
-          <p:cNvPr id="28" name="Text 22"/>
-          <p:cNvSpPr/>
-          <p:nvPr/>
-        </p:nvSpPr>
-        <p:spPr>
-          <a:xfrm>
-            <a:off x="11002975" y="6446520"/>
-            <a:ext cx="914400" cy="274320"/>
-          </a:xfrm>
-          <a:prstGeom prst="rect">
-            <a:avLst/>
-          </a:prstGeom>
-          <a:noFill/>
-          <a:ln/>
-        </p:spPr>
-        <p:txBody>
-          <a:bodyPr wrap="square" lIns="0" tIns="0" rIns="0" bIns="0" rtlCol="0" anchor="ctr"/>
-          <a:lstStyle/>
-          <a:p>
-            <a:pPr marL="0" indent="0" algn="r">
-              <a:buNone/>
-            </a:pPr>
-            <a:r>
-              <a:rPr lang="en-US" sz="900" dirty="0">
-                <a:solidFill>
-                  <a:srgbClr val="6E9679"/>
-                </a:solidFill>
-                <a:latin typeface="Courier New" pitchFamily="34" charset="0"/>
-                <a:ea typeface="Courier New" pitchFamily="34" charset="-122"/>
-                <a:cs typeface="Courier New" pitchFamily="34" charset="-120"/>
-              </a:rPr>
-              <a:t>8 / 20</a:t>
             </a:r>
             <a:endParaRPr lang="en-US" sz="900" dirty="0"/>
           </a:p>
